--- a/figures/edited/figS2_edited.pptx
+++ b/figures/edited/figS2_edited.pptx
@@ -2,12 +2,12 @@
 <file path=ppt/presentation.xml><?xml version="1.0" encoding="utf-8"?>
 <p:presentation xmlns:a="http://schemas.openxmlformats.org/drawingml/2006/main" xmlns:r="http://schemas.openxmlformats.org/officeDocument/2006/relationships" xmlns:p="http://schemas.openxmlformats.org/presentationml/2006/main" saveSubsetFonts="1" autoCompressPictures="0">
   <p:sldMasterIdLst>
-    <p:sldMasterId id="2147483684" r:id="rId1"/>
+    <p:sldMasterId id="2147483660" r:id="rId1"/>
   </p:sldMasterIdLst>
   <p:sldIdLst>
     <p:sldId id="256" r:id="rId2"/>
   </p:sldIdLst>
-  <p:sldSz cx="6400800" cy="3429000"/>
+  <p:sldSz cx="5029200" cy="5029200"/>
   <p:notesSz cx="6858000" cy="9144000"/>
   <p:defaultTextStyle>
     <a:defPPr>
@@ -104,6 +104,11 @@
       </a:defRPr>
     </a:lvl9pPr>
   </p:defaultTextStyle>
+  <p:extLst>
+    <p:ext uri="{EFAFB233-063F-42B5-8137-9DF3F51BA10A}">
+      <p15:sldGuideLst xmlns:p15="http://schemas.microsoft.com/office/powerpoint/2012/main"/>
+    </p:ext>
+  </p:extLst>
 </p:presentation>
 </file>
 
@@ -136,15 +141,15 @@
         </p:nvSpPr>
         <p:spPr>
           <a:xfrm>
-            <a:off x="800100" y="561181"/>
-            <a:ext cx="4800600" cy="1193800"/>
+            <a:off x="377190" y="823066"/>
+            <a:ext cx="4274820" cy="1750907"/>
           </a:xfrm>
         </p:spPr>
         <p:txBody>
           <a:bodyPr anchor="b"/>
           <a:lstStyle>
             <a:lvl1pPr algn="ctr">
-              <a:defRPr sz="3000"/>
+              <a:defRPr sz="3300"/>
             </a:lvl1pPr>
           </a:lstStyle>
           <a:p>
@@ -168,8 +173,8 @@
         </p:nvSpPr>
         <p:spPr>
           <a:xfrm>
-            <a:off x="800100" y="1801019"/>
-            <a:ext cx="4800600" cy="827881"/>
+            <a:off x="628650" y="2641495"/>
+            <a:ext cx="3771900" cy="1214225"/>
           </a:xfrm>
         </p:spPr>
         <p:txBody>
@@ -177,39 +182,39 @@
           <a:lstStyle>
             <a:lvl1pPr marL="0" indent="0" algn="ctr">
               <a:buNone/>
-              <a:defRPr sz="1200"/>
+              <a:defRPr sz="1320"/>
             </a:lvl1pPr>
-            <a:lvl2pPr marL="228600" indent="0" algn="ctr">
-              <a:buNone/>
-              <a:defRPr sz="1000"/>
+            <a:lvl2pPr marL="251460" indent="0" algn="ctr">
+              <a:buNone/>
+              <a:defRPr sz="1100"/>
             </a:lvl2pPr>
-            <a:lvl3pPr marL="457200" indent="0" algn="ctr">
-              <a:buNone/>
-              <a:defRPr sz="900"/>
+            <a:lvl3pPr marL="502920" indent="0" algn="ctr">
+              <a:buNone/>
+              <a:defRPr sz="990"/>
             </a:lvl3pPr>
-            <a:lvl4pPr marL="685800" indent="0" algn="ctr">
-              <a:buNone/>
-              <a:defRPr sz="800"/>
+            <a:lvl4pPr marL="754380" indent="0" algn="ctr">
+              <a:buNone/>
+              <a:defRPr sz="880"/>
             </a:lvl4pPr>
-            <a:lvl5pPr marL="914400" indent="0" algn="ctr">
-              <a:buNone/>
-              <a:defRPr sz="800"/>
+            <a:lvl5pPr marL="1005840" indent="0" algn="ctr">
+              <a:buNone/>
+              <a:defRPr sz="880"/>
             </a:lvl5pPr>
-            <a:lvl6pPr marL="1143000" indent="0" algn="ctr">
-              <a:buNone/>
-              <a:defRPr sz="800"/>
+            <a:lvl6pPr marL="1257300" indent="0" algn="ctr">
+              <a:buNone/>
+              <a:defRPr sz="880"/>
             </a:lvl6pPr>
-            <a:lvl7pPr marL="1371600" indent="0" algn="ctr">
-              <a:buNone/>
-              <a:defRPr sz="800"/>
+            <a:lvl7pPr marL="1508760" indent="0" algn="ctr">
+              <a:buNone/>
+              <a:defRPr sz="880"/>
             </a:lvl7pPr>
-            <a:lvl8pPr marL="1600200" indent="0" algn="ctr">
-              <a:buNone/>
-              <a:defRPr sz="800"/>
+            <a:lvl8pPr marL="1760220" indent="0" algn="ctr">
+              <a:buNone/>
+              <a:defRPr sz="880"/>
             </a:lvl8pPr>
-            <a:lvl9pPr marL="1828800" indent="0" algn="ctr">
-              <a:buNone/>
-              <a:defRPr sz="800"/>
+            <a:lvl9pPr marL="2011680" indent="0" algn="ctr">
+              <a:buNone/>
+              <a:defRPr sz="880"/>
             </a:lvl9pPr>
           </a:lstStyle>
           <a:p>
@@ -236,9 +241,9 @@
           <a:bodyPr/>
           <a:lstStyle/>
           <a:p>
-            <a:fld id="{9846A748-8F43-1948-93A2-534F40B96D47}" type="datetimeFigureOut">
+            <a:fld id="{1B7807B8-1B99-2143-B8FB-DB12FDB791D8}" type="datetimeFigureOut">
               <a:rPr lang="en-US" smtClean="0"/>
-              <a:t>6/1/26</a:t>
+              <a:t>6/17/26</a:t>
             </a:fld>
             <a:endParaRPr lang="en-US"/>
           </a:p>
@@ -278,7 +283,7 @@
           <a:bodyPr/>
           <a:lstStyle/>
           <a:p>
-            <a:fld id="{24F58B1C-EF32-7C42-A3EE-3DE6FFA71476}" type="slidenum">
+            <a:fld id="{F8FEC05D-4667-DB41-B9BC-E926823F0BF9}" type="slidenum">
               <a:rPr lang="en-US" smtClean="0"/>
               <a:t>‹#›</a:t>
             </a:fld>
@@ -289,7 +294,7 @@
     </p:spTree>
     <p:extLst>
       <p:ext uri="{BB962C8B-B14F-4D97-AF65-F5344CB8AC3E}">
-        <p14:creationId xmlns:p14="http://schemas.microsoft.com/office/powerpoint/2010/main" val="1011092632"/>
+        <p14:creationId xmlns:p14="http://schemas.microsoft.com/office/powerpoint/2010/main" val="3331311626"/>
       </p:ext>
     </p:extLst>
   </p:cSld>
@@ -406,9 +411,9 @@
           <a:bodyPr/>
           <a:lstStyle/>
           <a:p>
-            <a:fld id="{9846A748-8F43-1948-93A2-534F40B96D47}" type="datetimeFigureOut">
+            <a:fld id="{1B7807B8-1B99-2143-B8FB-DB12FDB791D8}" type="datetimeFigureOut">
               <a:rPr lang="en-US" smtClean="0"/>
-              <a:t>6/1/26</a:t>
+              <a:t>6/17/26</a:t>
             </a:fld>
             <a:endParaRPr lang="en-US"/>
           </a:p>
@@ -448,7 +453,7 @@
           <a:bodyPr/>
           <a:lstStyle/>
           <a:p>
-            <a:fld id="{24F58B1C-EF32-7C42-A3EE-3DE6FFA71476}" type="slidenum">
+            <a:fld id="{F8FEC05D-4667-DB41-B9BC-E926823F0BF9}" type="slidenum">
               <a:rPr lang="en-US" smtClean="0"/>
               <a:t>‹#›</a:t>
             </a:fld>
@@ -459,7 +464,7 @@
     </p:spTree>
     <p:extLst>
       <p:ext uri="{BB962C8B-B14F-4D97-AF65-F5344CB8AC3E}">
-        <p14:creationId xmlns:p14="http://schemas.microsoft.com/office/powerpoint/2010/main" val="4007748840"/>
+        <p14:creationId xmlns:p14="http://schemas.microsoft.com/office/powerpoint/2010/main" val="2909666066"/>
       </p:ext>
     </p:extLst>
   </p:cSld>
@@ -498,8 +503,8 @@
         </p:nvSpPr>
         <p:spPr>
           <a:xfrm>
-            <a:off x="4580572" y="182562"/>
-            <a:ext cx="1380173" cy="2905919"/>
+            <a:off x="3599022" y="267758"/>
+            <a:ext cx="1084421" cy="4262015"/>
           </a:xfrm>
         </p:spPr>
         <p:txBody>
@@ -526,8 +531,8 @@
         </p:nvSpPr>
         <p:spPr>
           <a:xfrm>
-            <a:off x="440055" y="182562"/>
-            <a:ext cx="4060508" cy="2905919"/>
+            <a:off x="345758" y="267758"/>
+            <a:ext cx="3190399" cy="4262015"/>
           </a:xfrm>
         </p:spPr>
         <p:txBody>
@@ -586,9 +591,9 @@
           <a:bodyPr/>
           <a:lstStyle/>
           <a:p>
-            <a:fld id="{9846A748-8F43-1948-93A2-534F40B96D47}" type="datetimeFigureOut">
+            <a:fld id="{1B7807B8-1B99-2143-B8FB-DB12FDB791D8}" type="datetimeFigureOut">
               <a:rPr lang="en-US" smtClean="0"/>
-              <a:t>6/1/26</a:t>
+              <a:t>6/17/26</a:t>
             </a:fld>
             <a:endParaRPr lang="en-US"/>
           </a:p>
@@ -628,7 +633,7 @@
           <a:bodyPr/>
           <a:lstStyle/>
           <a:p>
-            <a:fld id="{24F58B1C-EF32-7C42-A3EE-3DE6FFA71476}" type="slidenum">
+            <a:fld id="{F8FEC05D-4667-DB41-B9BC-E926823F0BF9}" type="slidenum">
               <a:rPr lang="en-US" smtClean="0"/>
               <a:t>‹#›</a:t>
             </a:fld>
@@ -639,7 +644,7 @@
     </p:spTree>
     <p:extLst>
       <p:ext uri="{BB962C8B-B14F-4D97-AF65-F5344CB8AC3E}">
-        <p14:creationId xmlns:p14="http://schemas.microsoft.com/office/powerpoint/2010/main" val="1095576886"/>
+        <p14:creationId xmlns:p14="http://schemas.microsoft.com/office/powerpoint/2010/main" val="1970951511"/>
       </p:ext>
     </p:extLst>
   </p:cSld>
@@ -756,9 +761,9 @@
           <a:bodyPr/>
           <a:lstStyle/>
           <a:p>
-            <a:fld id="{9846A748-8F43-1948-93A2-534F40B96D47}" type="datetimeFigureOut">
+            <a:fld id="{1B7807B8-1B99-2143-B8FB-DB12FDB791D8}" type="datetimeFigureOut">
               <a:rPr lang="en-US" smtClean="0"/>
-              <a:t>6/1/26</a:t>
+              <a:t>6/17/26</a:t>
             </a:fld>
             <a:endParaRPr lang="en-US"/>
           </a:p>
@@ -798,7 +803,7 @@
           <a:bodyPr/>
           <a:lstStyle/>
           <a:p>
-            <a:fld id="{24F58B1C-EF32-7C42-A3EE-3DE6FFA71476}" type="slidenum">
+            <a:fld id="{F8FEC05D-4667-DB41-B9BC-E926823F0BF9}" type="slidenum">
               <a:rPr lang="en-US" smtClean="0"/>
               <a:t>‹#›</a:t>
             </a:fld>
@@ -809,7 +814,7 @@
     </p:spTree>
     <p:extLst>
       <p:ext uri="{BB962C8B-B14F-4D97-AF65-F5344CB8AC3E}">
-        <p14:creationId xmlns:p14="http://schemas.microsoft.com/office/powerpoint/2010/main" val="1000039511"/>
+        <p14:creationId xmlns:p14="http://schemas.microsoft.com/office/powerpoint/2010/main" val="4237160709"/>
       </p:ext>
     </p:extLst>
   </p:cSld>
@@ -848,15 +853,15 @@
         </p:nvSpPr>
         <p:spPr>
           <a:xfrm>
-            <a:off x="436721" y="854869"/>
-            <a:ext cx="5520690" cy="1426369"/>
+            <a:off x="343138" y="1253809"/>
+            <a:ext cx="4337685" cy="2092007"/>
           </a:xfrm>
         </p:spPr>
         <p:txBody>
           <a:bodyPr anchor="b"/>
           <a:lstStyle>
             <a:lvl1pPr>
-              <a:defRPr sz="3000"/>
+              <a:defRPr sz="3300"/>
             </a:lvl1pPr>
           </a:lstStyle>
           <a:p>
@@ -880,8 +885,8 @@
         </p:nvSpPr>
         <p:spPr>
           <a:xfrm>
-            <a:off x="436721" y="2294732"/>
-            <a:ext cx="5520690" cy="750094"/>
+            <a:off x="343138" y="3365607"/>
+            <a:ext cx="4337685" cy="1100137"/>
           </a:xfrm>
         </p:spPr>
         <p:txBody>
@@ -889,7 +894,7 @@
           <a:lstStyle>
             <a:lvl1pPr marL="0" indent="0">
               <a:buNone/>
-              <a:defRPr sz="1200">
+              <a:defRPr sz="1320">
                 <a:solidFill>
                   <a:schemeClr val="tx1">
                     <a:tint val="82000"/>
@@ -897,9 +902,9 @@
                 </a:solidFill>
               </a:defRPr>
             </a:lvl1pPr>
-            <a:lvl2pPr marL="228600" indent="0">
-              <a:buNone/>
-              <a:defRPr sz="1000">
+            <a:lvl2pPr marL="251460" indent="0">
+              <a:buNone/>
+              <a:defRPr sz="1100">
                 <a:solidFill>
                   <a:schemeClr val="tx1">
                     <a:tint val="82000"/>
@@ -907,9 +912,9 @@
                 </a:solidFill>
               </a:defRPr>
             </a:lvl2pPr>
-            <a:lvl3pPr marL="457200" indent="0">
-              <a:buNone/>
-              <a:defRPr sz="900">
+            <a:lvl3pPr marL="502920" indent="0">
+              <a:buNone/>
+              <a:defRPr sz="990">
                 <a:solidFill>
                   <a:schemeClr val="tx1">
                     <a:tint val="82000"/>
@@ -917,9 +922,9 @@
                 </a:solidFill>
               </a:defRPr>
             </a:lvl3pPr>
-            <a:lvl4pPr marL="685800" indent="0">
-              <a:buNone/>
-              <a:defRPr sz="800">
+            <a:lvl4pPr marL="754380" indent="0">
+              <a:buNone/>
+              <a:defRPr sz="880">
                 <a:solidFill>
                   <a:schemeClr val="tx1">
                     <a:tint val="82000"/>
@@ -927,9 +932,9 @@
                 </a:solidFill>
               </a:defRPr>
             </a:lvl4pPr>
-            <a:lvl5pPr marL="914400" indent="0">
-              <a:buNone/>
-              <a:defRPr sz="800">
+            <a:lvl5pPr marL="1005840" indent="0">
+              <a:buNone/>
+              <a:defRPr sz="880">
                 <a:solidFill>
                   <a:schemeClr val="tx1">
                     <a:tint val="82000"/>
@@ -937,9 +942,9 @@
                 </a:solidFill>
               </a:defRPr>
             </a:lvl5pPr>
-            <a:lvl6pPr marL="1143000" indent="0">
-              <a:buNone/>
-              <a:defRPr sz="800">
+            <a:lvl6pPr marL="1257300" indent="0">
+              <a:buNone/>
+              <a:defRPr sz="880">
                 <a:solidFill>
                   <a:schemeClr val="tx1">
                     <a:tint val="82000"/>
@@ -947,9 +952,9 @@
                 </a:solidFill>
               </a:defRPr>
             </a:lvl6pPr>
-            <a:lvl7pPr marL="1371600" indent="0">
-              <a:buNone/>
-              <a:defRPr sz="800">
+            <a:lvl7pPr marL="1508760" indent="0">
+              <a:buNone/>
+              <a:defRPr sz="880">
                 <a:solidFill>
                   <a:schemeClr val="tx1">
                     <a:tint val="82000"/>
@@ -957,9 +962,9 @@
                 </a:solidFill>
               </a:defRPr>
             </a:lvl7pPr>
-            <a:lvl8pPr marL="1600200" indent="0">
-              <a:buNone/>
-              <a:defRPr sz="800">
+            <a:lvl8pPr marL="1760220" indent="0">
+              <a:buNone/>
+              <a:defRPr sz="880">
                 <a:solidFill>
                   <a:schemeClr val="tx1">
                     <a:tint val="82000"/>
@@ -967,9 +972,9 @@
                 </a:solidFill>
               </a:defRPr>
             </a:lvl8pPr>
-            <a:lvl9pPr marL="1828800" indent="0">
-              <a:buNone/>
-              <a:defRPr sz="800">
+            <a:lvl9pPr marL="2011680" indent="0">
+              <a:buNone/>
+              <a:defRPr sz="880">
                 <a:solidFill>
                   <a:schemeClr val="tx1">
                     <a:tint val="82000"/>
@@ -1002,9 +1007,9 @@
           <a:bodyPr/>
           <a:lstStyle/>
           <a:p>
-            <a:fld id="{9846A748-8F43-1948-93A2-534F40B96D47}" type="datetimeFigureOut">
+            <a:fld id="{1B7807B8-1B99-2143-B8FB-DB12FDB791D8}" type="datetimeFigureOut">
               <a:rPr lang="en-US" smtClean="0"/>
-              <a:t>6/1/26</a:t>
+              <a:t>6/17/26</a:t>
             </a:fld>
             <a:endParaRPr lang="en-US"/>
           </a:p>
@@ -1044,7 +1049,7 @@
           <a:bodyPr/>
           <a:lstStyle/>
           <a:p>
-            <a:fld id="{24F58B1C-EF32-7C42-A3EE-3DE6FFA71476}" type="slidenum">
+            <a:fld id="{F8FEC05D-4667-DB41-B9BC-E926823F0BF9}" type="slidenum">
               <a:rPr lang="en-US" smtClean="0"/>
               <a:t>‹#›</a:t>
             </a:fld>
@@ -1055,7 +1060,7 @@
     </p:spTree>
     <p:extLst>
       <p:ext uri="{BB962C8B-B14F-4D97-AF65-F5344CB8AC3E}">
-        <p14:creationId xmlns:p14="http://schemas.microsoft.com/office/powerpoint/2010/main" val="1913960294"/>
+        <p14:creationId xmlns:p14="http://schemas.microsoft.com/office/powerpoint/2010/main" val="2577363553"/>
       </p:ext>
     </p:extLst>
   </p:cSld>
@@ -1117,8 +1122,8 @@
         </p:nvSpPr>
         <p:spPr>
           <a:xfrm>
-            <a:off x="440055" y="912812"/>
-            <a:ext cx="2720340" cy="2175669"/>
+            <a:off x="345758" y="1338792"/>
+            <a:ext cx="2137410" cy="3190981"/>
           </a:xfrm>
         </p:spPr>
         <p:txBody>
@@ -1174,8 +1179,8 @@
         </p:nvSpPr>
         <p:spPr>
           <a:xfrm>
-            <a:off x="3240405" y="912812"/>
-            <a:ext cx="2720340" cy="2175669"/>
+            <a:off x="2546033" y="1338792"/>
+            <a:ext cx="2137410" cy="3190981"/>
           </a:xfrm>
         </p:spPr>
         <p:txBody>
@@ -1234,9 +1239,9 @@
           <a:bodyPr/>
           <a:lstStyle/>
           <a:p>
-            <a:fld id="{9846A748-8F43-1948-93A2-534F40B96D47}" type="datetimeFigureOut">
+            <a:fld id="{1B7807B8-1B99-2143-B8FB-DB12FDB791D8}" type="datetimeFigureOut">
               <a:rPr lang="en-US" smtClean="0"/>
-              <a:t>6/1/26</a:t>
+              <a:t>6/17/26</a:t>
             </a:fld>
             <a:endParaRPr lang="en-US"/>
           </a:p>
@@ -1276,7 +1281,7 @@
           <a:bodyPr/>
           <a:lstStyle/>
           <a:p>
-            <a:fld id="{24F58B1C-EF32-7C42-A3EE-3DE6FFA71476}" type="slidenum">
+            <a:fld id="{F8FEC05D-4667-DB41-B9BC-E926823F0BF9}" type="slidenum">
               <a:rPr lang="en-US" smtClean="0"/>
               <a:t>‹#›</a:t>
             </a:fld>
@@ -1287,7 +1292,7 @@
     </p:spTree>
     <p:extLst>
       <p:ext uri="{BB962C8B-B14F-4D97-AF65-F5344CB8AC3E}">
-        <p14:creationId xmlns:p14="http://schemas.microsoft.com/office/powerpoint/2010/main" val="3843549907"/>
+        <p14:creationId xmlns:p14="http://schemas.microsoft.com/office/powerpoint/2010/main" val="3241999629"/>
       </p:ext>
     </p:extLst>
   </p:cSld>
@@ -1326,8 +1331,8 @@
         </p:nvSpPr>
         <p:spPr>
           <a:xfrm>
-            <a:off x="440889" y="182563"/>
-            <a:ext cx="5520690" cy="662782"/>
+            <a:off x="346413" y="267759"/>
+            <a:ext cx="4337685" cy="972080"/>
           </a:xfrm>
         </p:spPr>
         <p:txBody>
@@ -1354,8 +1359,8 @@
         </p:nvSpPr>
         <p:spPr>
           <a:xfrm>
-            <a:off x="440889" y="840582"/>
-            <a:ext cx="2707838" cy="411956"/>
+            <a:off x="346413" y="1232853"/>
+            <a:ext cx="2127587" cy="604202"/>
           </a:xfrm>
         </p:spPr>
         <p:txBody>
@@ -1363,39 +1368,39 @@
           <a:lstStyle>
             <a:lvl1pPr marL="0" indent="0">
               <a:buNone/>
-              <a:defRPr sz="1200" b="1"/>
+              <a:defRPr sz="1320" b="1"/>
             </a:lvl1pPr>
-            <a:lvl2pPr marL="228600" indent="0">
-              <a:buNone/>
-              <a:defRPr sz="1000" b="1"/>
+            <a:lvl2pPr marL="251460" indent="0">
+              <a:buNone/>
+              <a:defRPr sz="1100" b="1"/>
             </a:lvl2pPr>
-            <a:lvl3pPr marL="457200" indent="0">
-              <a:buNone/>
-              <a:defRPr sz="900" b="1"/>
+            <a:lvl3pPr marL="502920" indent="0">
+              <a:buNone/>
+              <a:defRPr sz="990" b="1"/>
             </a:lvl3pPr>
-            <a:lvl4pPr marL="685800" indent="0">
-              <a:buNone/>
-              <a:defRPr sz="800" b="1"/>
+            <a:lvl4pPr marL="754380" indent="0">
+              <a:buNone/>
+              <a:defRPr sz="880" b="1"/>
             </a:lvl4pPr>
-            <a:lvl5pPr marL="914400" indent="0">
-              <a:buNone/>
-              <a:defRPr sz="800" b="1"/>
+            <a:lvl5pPr marL="1005840" indent="0">
+              <a:buNone/>
+              <a:defRPr sz="880" b="1"/>
             </a:lvl5pPr>
-            <a:lvl6pPr marL="1143000" indent="0">
-              <a:buNone/>
-              <a:defRPr sz="800" b="1"/>
+            <a:lvl6pPr marL="1257300" indent="0">
+              <a:buNone/>
+              <a:defRPr sz="880" b="1"/>
             </a:lvl6pPr>
-            <a:lvl7pPr marL="1371600" indent="0">
-              <a:buNone/>
-              <a:defRPr sz="800" b="1"/>
+            <a:lvl7pPr marL="1508760" indent="0">
+              <a:buNone/>
+              <a:defRPr sz="880" b="1"/>
             </a:lvl7pPr>
-            <a:lvl8pPr marL="1600200" indent="0">
-              <a:buNone/>
-              <a:defRPr sz="800" b="1"/>
+            <a:lvl8pPr marL="1760220" indent="0">
+              <a:buNone/>
+              <a:defRPr sz="880" b="1"/>
             </a:lvl8pPr>
-            <a:lvl9pPr marL="1828800" indent="0">
-              <a:buNone/>
-              <a:defRPr sz="800" b="1"/>
+            <a:lvl9pPr marL="2011680" indent="0">
+              <a:buNone/>
+              <a:defRPr sz="880" b="1"/>
             </a:lvl9pPr>
           </a:lstStyle>
           <a:p>
@@ -1419,8 +1424,8 @@
         </p:nvSpPr>
         <p:spPr>
           <a:xfrm>
-            <a:off x="440889" y="1252538"/>
-            <a:ext cx="2707838" cy="1842294"/>
+            <a:off x="346413" y="1837055"/>
+            <a:ext cx="2127587" cy="2702031"/>
           </a:xfrm>
         </p:spPr>
         <p:txBody>
@@ -1476,8 +1481,8 @@
         </p:nvSpPr>
         <p:spPr>
           <a:xfrm>
-            <a:off x="3240405" y="840582"/>
-            <a:ext cx="2721174" cy="411956"/>
+            <a:off x="2546033" y="1232853"/>
+            <a:ext cx="2138065" cy="604202"/>
           </a:xfrm>
         </p:spPr>
         <p:txBody>
@@ -1485,39 +1490,39 @@
           <a:lstStyle>
             <a:lvl1pPr marL="0" indent="0">
               <a:buNone/>
-              <a:defRPr sz="1200" b="1"/>
+              <a:defRPr sz="1320" b="1"/>
             </a:lvl1pPr>
-            <a:lvl2pPr marL="228600" indent="0">
-              <a:buNone/>
-              <a:defRPr sz="1000" b="1"/>
+            <a:lvl2pPr marL="251460" indent="0">
+              <a:buNone/>
+              <a:defRPr sz="1100" b="1"/>
             </a:lvl2pPr>
-            <a:lvl3pPr marL="457200" indent="0">
-              <a:buNone/>
-              <a:defRPr sz="900" b="1"/>
+            <a:lvl3pPr marL="502920" indent="0">
+              <a:buNone/>
+              <a:defRPr sz="990" b="1"/>
             </a:lvl3pPr>
-            <a:lvl4pPr marL="685800" indent="0">
-              <a:buNone/>
-              <a:defRPr sz="800" b="1"/>
+            <a:lvl4pPr marL="754380" indent="0">
+              <a:buNone/>
+              <a:defRPr sz="880" b="1"/>
             </a:lvl4pPr>
-            <a:lvl5pPr marL="914400" indent="0">
-              <a:buNone/>
-              <a:defRPr sz="800" b="1"/>
+            <a:lvl5pPr marL="1005840" indent="0">
+              <a:buNone/>
+              <a:defRPr sz="880" b="1"/>
             </a:lvl5pPr>
-            <a:lvl6pPr marL="1143000" indent="0">
-              <a:buNone/>
-              <a:defRPr sz="800" b="1"/>
+            <a:lvl6pPr marL="1257300" indent="0">
+              <a:buNone/>
+              <a:defRPr sz="880" b="1"/>
             </a:lvl6pPr>
-            <a:lvl7pPr marL="1371600" indent="0">
-              <a:buNone/>
-              <a:defRPr sz="800" b="1"/>
+            <a:lvl7pPr marL="1508760" indent="0">
+              <a:buNone/>
+              <a:defRPr sz="880" b="1"/>
             </a:lvl7pPr>
-            <a:lvl8pPr marL="1600200" indent="0">
-              <a:buNone/>
-              <a:defRPr sz="800" b="1"/>
+            <a:lvl8pPr marL="1760220" indent="0">
+              <a:buNone/>
+              <a:defRPr sz="880" b="1"/>
             </a:lvl8pPr>
-            <a:lvl9pPr marL="1828800" indent="0">
-              <a:buNone/>
-              <a:defRPr sz="800" b="1"/>
+            <a:lvl9pPr marL="2011680" indent="0">
+              <a:buNone/>
+              <a:defRPr sz="880" b="1"/>
             </a:lvl9pPr>
           </a:lstStyle>
           <a:p>
@@ -1541,8 +1546,8 @@
         </p:nvSpPr>
         <p:spPr>
           <a:xfrm>
-            <a:off x="3240405" y="1252538"/>
-            <a:ext cx="2721174" cy="1842294"/>
+            <a:off x="2546033" y="1837055"/>
+            <a:ext cx="2138065" cy="2702031"/>
           </a:xfrm>
         </p:spPr>
         <p:txBody>
@@ -1601,9 +1606,9 @@
           <a:bodyPr/>
           <a:lstStyle/>
           <a:p>
-            <a:fld id="{9846A748-8F43-1948-93A2-534F40B96D47}" type="datetimeFigureOut">
+            <a:fld id="{1B7807B8-1B99-2143-B8FB-DB12FDB791D8}" type="datetimeFigureOut">
               <a:rPr lang="en-US" smtClean="0"/>
-              <a:t>6/1/26</a:t>
+              <a:t>6/17/26</a:t>
             </a:fld>
             <a:endParaRPr lang="en-US"/>
           </a:p>
@@ -1643,7 +1648,7 @@
           <a:bodyPr/>
           <a:lstStyle/>
           <a:p>
-            <a:fld id="{24F58B1C-EF32-7C42-A3EE-3DE6FFA71476}" type="slidenum">
+            <a:fld id="{F8FEC05D-4667-DB41-B9BC-E926823F0BF9}" type="slidenum">
               <a:rPr lang="en-US" smtClean="0"/>
               <a:t>‹#›</a:t>
             </a:fld>
@@ -1654,7 +1659,7 @@
     </p:spTree>
     <p:extLst>
       <p:ext uri="{BB962C8B-B14F-4D97-AF65-F5344CB8AC3E}">
-        <p14:creationId xmlns:p14="http://schemas.microsoft.com/office/powerpoint/2010/main" val="3247780270"/>
+        <p14:creationId xmlns:p14="http://schemas.microsoft.com/office/powerpoint/2010/main" val="2126185925"/>
       </p:ext>
     </p:extLst>
   </p:cSld>
@@ -1719,9 +1724,9 @@
           <a:bodyPr/>
           <a:lstStyle/>
           <a:p>
-            <a:fld id="{9846A748-8F43-1948-93A2-534F40B96D47}" type="datetimeFigureOut">
+            <a:fld id="{1B7807B8-1B99-2143-B8FB-DB12FDB791D8}" type="datetimeFigureOut">
               <a:rPr lang="en-US" smtClean="0"/>
-              <a:t>6/1/26</a:t>
+              <a:t>6/17/26</a:t>
             </a:fld>
             <a:endParaRPr lang="en-US"/>
           </a:p>
@@ -1761,7 +1766,7 @@
           <a:bodyPr/>
           <a:lstStyle/>
           <a:p>
-            <a:fld id="{24F58B1C-EF32-7C42-A3EE-3DE6FFA71476}" type="slidenum">
+            <a:fld id="{F8FEC05D-4667-DB41-B9BC-E926823F0BF9}" type="slidenum">
               <a:rPr lang="en-US" smtClean="0"/>
               <a:t>‹#›</a:t>
             </a:fld>
@@ -1772,7 +1777,7 @@
     </p:spTree>
     <p:extLst>
       <p:ext uri="{BB962C8B-B14F-4D97-AF65-F5344CB8AC3E}">
-        <p14:creationId xmlns:p14="http://schemas.microsoft.com/office/powerpoint/2010/main" val="2996382712"/>
+        <p14:creationId xmlns:p14="http://schemas.microsoft.com/office/powerpoint/2010/main" val="1673433270"/>
       </p:ext>
     </p:extLst>
   </p:cSld>
@@ -1814,9 +1819,9 @@
           <a:bodyPr/>
           <a:lstStyle/>
           <a:p>
-            <a:fld id="{9846A748-8F43-1948-93A2-534F40B96D47}" type="datetimeFigureOut">
+            <a:fld id="{1B7807B8-1B99-2143-B8FB-DB12FDB791D8}" type="datetimeFigureOut">
               <a:rPr lang="en-US" smtClean="0"/>
-              <a:t>6/1/26</a:t>
+              <a:t>6/17/26</a:t>
             </a:fld>
             <a:endParaRPr lang="en-US"/>
           </a:p>
@@ -1856,7 +1861,7 @@
           <a:bodyPr/>
           <a:lstStyle/>
           <a:p>
-            <a:fld id="{24F58B1C-EF32-7C42-A3EE-3DE6FFA71476}" type="slidenum">
+            <a:fld id="{F8FEC05D-4667-DB41-B9BC-E926823F0BF9}" type="slidenum">
               <a:rPr lang="en-US" smtClean="0"/>
               <a:t>‹#›</a:t>
             </a:fld>
@@ -1867,7 +1872,7 @@
     </p:spTree>
     <p:extLst>
       <p:ext uri="{BB962C8B-B14F-4D97-AF65-F5344CB8AC3E}">
-        <p14:creationId xmlns:p14="http://schemas.microsoft.com/office/powerpoint/2010/main" val="1256623425"/>
+        <p14:creationId xmlns:p14="http://schemas.microsoft.com/office/powerpoint/2010/main" val="2656159865"/>
       </p:ext>
     </p:extLst>
   </p:cSld>
@@ -1906,15 +1911,15 @@
         </p:nvSpPr>
         <p:spPr>
           <a:xfrm>
-            <a:off x="440889" y="228600"/>
-            <a:ext cx="2064424" cy="800100"/>
+            <a:off x="346413" y="335280"/>
+            <a:ext cx="1622048" cy="1173480"/>
           </a:xfrm>
         </p:spPr>
         <p:txBody>
           <a:bodyPr anchor="b"/>
           <a:lstStyle>
             <a:lvl1pPr>
-              <a:defRPr sz="1600"/>
+              <a:defRPr sz="1760"/>
             </a:lvl1pPr>
           </a:lstStyle>
           <a:p>
@@ -1938,39 +1943,39 @@
         </p:nvSpPr>
         <p:spPr>
           <a:xfrm>
-            <a:off x="2721174" y="493713"/>
-            <a:ext cx="3240405" cy="2436813"/>
+            <a:off x="2138065" y="724113"/>
+            <a:ext cx="2546033" cy="3573992"/>
           </a:xfrm>
         </p:spPr>
         <p:txBody>
           <a:bodyPr/>
           <a:lstStyle>
             <a:lvl1pPr>
-              <a:defRPr sz="1600"/>
+              <a:defRPr sz="1760"/>
             </a:lvl1pPr>
             <a:lvl2pPr>
-              <a:defRPr sz="1400"/>
+              <a:defRPr sz="1540"/>
             </a:lvl2pPr>
             <a:lvl3pPr>
-              <a:defRPr sz="1200"/>
+              <a:defRPr sz="1320"/>
             </a:lvl3pPr>
             <a:lvl4pPr>
-              <a:defRPr sz="1000"/>
+              <a:defRPr sz="1100"/>
             </a:lvl4pPr>
             <a:lvl5pPr>
-              <a:defRPr sz="1000"/>
+              <a:defRPr sz="1100"/>
             </a:lvl5pPr>
             <a:lvl6pPr>
-              <a:defRPr sz="1000"/>
+              <a:defRPr sz="1100"/>
             </a:lvl6pPr>
             <a:lvl7pPr>
-              <a:defRPr sz="1000"/>
+              <a:defRPr sz="1100"/>
             </a:lvl7pPr>
             <a:lvl8pPr>
-              <a:defRPr sz="1000"/>
+              <a:defRPr sz="1100"/>
             </a:lvl8pPr>
             <a:lvl9pPr>
-              <a:defRPr sz="1000"/>
+              <a:defRPr sz="1100"/>
             </a:lvl9pPr>
           </a:lstStyle>
           <a:p>
@@ -2023,8 +2028,8 @@
         </p:nvSpPr>
         <p:spPr>
           <a:xfrm>
-            <a:off x="440889" y="1028700"/>
-            <a:ext cx="2064424" cy="1905794"/>
+            <a:off x="346413" y="1508760"/>
+            <a:ext cx="1622048" cy="2795165"/>
           </a:xfrm>
         </p:spPr>
         <p:txBody>
@@ -2032,39 +2037,39 @@
           <a:lstStyle>
             <a:lvl1pPr marL="0" indent="0">
               <a:buNone/>
-              <a:defRPr sz="800"/>
+              <a:defRPr sz="880"/>
             </a:lvl1pPr>
-            <a:lvl2pPr marL="228600" indent="0">
-              <a:buNone/>
-              <a:defRPr sz="700"/>
+            <a:lvl2pPr marL="251460" indent="0">
+              <a:buNone/>
+              <a:defRPr sz="770"/>
             </a:lvl2pPr>
-            <a:lvl3pPr marL="457200" indent="0">
-              <a:buNone/>
-              <a:defRPr sz="600"/>
+            <a:lvl3pPr marL="502920" indent="0">
+              <a:buNone/>
+              <a:defRPr sz="660"/>
             </a:lvl3pPr>
-            <a:lvl4pPr marL="685800" indent="0">
-              <a:buNone/>
-              <a:defRPr sz="500"/>
+            <a:lvl4pPr marL="754380" indent="0">
+              <a:buNone/>
+              <a:defRPr sz="550"/>
             </a:lvl4pPr>
-            <a:lvl5pPr marL="914400" indent="0">
-              <a:buNone/>
-              <a:defRPr sz="500"/>
+            <a:lvl5pPr marL="1005840" indent="0">
+              <a:buNone/>
+              <a:defRPr sz="550"/>
             </a:lvl5pPr>
-            <a:lvl6pPr marL="1143000" indent="0">
-              <a:buNone/>
-              <a:defRPr sz="500"/>
+            <a:lvl6pPr marL="1257300" indent="0">
+              <a:buNone/>
+              <a:defRPr sz="550"/>
             </a:lvl6pPr>
-            <a:lvl7pPr marL="1371600" indent="0">
-              <a:buNone/>
-              <a:defRPr sz="500"/>
+            <a:lvl7pPr marL="1508760" indent="0">
+              <a:buNone/>
+              <a:defRPr sz="550"/>
             </a:lvl7pPr>
-            <a:lvl8pPr marL="1600200" indent="0">
-              <a:buNone/>
-              <a:defRPr sz="500"/>
+            <a:lvl8pPr marL="1760220" indent="0">
+              <a:buNone/>
+              <a:defRPr sz="550"/>
             </a:lvl8pPr>
-            <a:lvl9pPr marL="1828800" indent="0">
-              <a:buNone/>
-              <a:defRPr sz="500"/>
+            <a:lvl9pPr marL="2011680" indent="0">
+              <a:buNone/>
+              <a:defRPr sz="550"/>
             </a:lvl9pPr>
           </a:lstStyle>
           <a:p>
@@ -2091,9 +2096,9 @@
           <a:bodyPr/>
           <a:lstStyle/>
           <a:p>
-            <a:fld id="{9846A748-8F43-1948-93A2-534F40B96D47}" type="datetimeFigureOut">
+            <a:fld id="{1B7807B8-1B99-2143-B8FB-DB12FDB791D8}" type="datetimeFigureOut">
               <a:rPr lang="en-US" smtClean="0"/>
-              <a:t>6/1/26</a:t>
+              <a:t>6/17/26</a:t>
             </a:fld>
             <a:endParaRPr lang="en-US"/>
           </a:p>
@@ -2133,7 +2138,7 @@
           <a:bodyPr/>
           <a:lstStyle/>
           <a:p>
-            <a:fld id="{24F58B1C-EF32-7C42-A3EE-3DE6FFA71476}" type="slidenum">
+            <a:fld id="{F8FEC05D-4667-DB41-B9BC-E926823F0BF9}" type="slidenum">
               <a:rPr lang="en-US" smtClean="0"/>
               <a:t>‹#›</a:t>
             </a:fld>
@@ -2144,7 +2149,7 @@
     </p:spTree>
     <p:extLst>
       <p:ext uri="{BB962C8B-B14F-4D97-AF65-F5344CB8AC3E}">
-        <p14:creationId xmlns:p14="http://schemas.microsoft.com/office/powerpoint/2010/main" val="3542678761"/>
+        <p14:creationId xmlns:p14="http://schemas.microsoft.com/office/powerpoint/2010/main" val="336581226"/>
       </p:ext>
     </p:extLst>
   </p:cSld>
@@ -2183,15 +2188,15 @@
         </p:nvSpPr>
         <p:spPr>
           <a:xfrm>
-            <a:off x="440889" y="228600"/>
-            <a:ext cx="2064424" cy="800100"/>
+            <a:off x="346413" y="335280"/>
+            <a:ext cx="1622048" cy="1173480"/>
           </a:xfrm>
         </p:spPr>
         <p:txBody>
           <a:bodyPr anchor="b"/>
           <a:lstStyle>
             <a:lvl1pPr>
-              <a:defRPr sz="1600"/>
+              <a:defRPr sz="1760"/>
             </a:lvl1pPr>
           </a:lstStyle>
           <a:p>
@@ -2215,8 +2220,8 @@
         </p:nvSpPr>
         <p:spPr>
           <a:xfrm>
-            <a:off x="2721174" y="493713"/>
-            <a:ext cx="3240405" cy="2436813"/>
+            <a:off x="2138065" y="724113"/>
+            <a:ext cx="2546033" cy="3573992"/>
           </a:xfrm>
         </p:spPr>
         <p:txBody>
@@ -2224,39 +2229,39 @@
           <a:lstStyle>
             <a:lvl1pPr marL="0" indent="0">
               <a:buNone/>
-              <a:defRPr sz="1600"/>
+              <a:defRPr sz="1760"/>
             </a:lvl1pPr>
-            <a:lvl2pPr marL="228600" indent="0">
-              <a:buNone/>
-              <a:defRPr sz="1400"/>
+            <a:lvl2pPr marL="251460" indent="0">
+              <a:buNone/>
+              <a:defRPr sz="1540"/>
             </a:lvl2pPr>
-            <a:lvl3pPr marL="457200" indent="0">
-              <a:buNone/>
-              <a:defRPr sz="1200"/>
+            <a:lvl3pPr marL="502920" indent="0">
+              <a:buNone/>
+              <a:defRPr sz="1320"/>
             </a:lvl3pPr>
-            <a:lvl4pPr marL="685800" indent="0">
-              <a:buNone/>
-              <a:defRPr sz="1000"/>
+            <a:lvl4pPr marL="754380" indent="0">
+              <a:buNone/>
+              <a:defRPr sz="1100"/>
             </a:lvl4pPr>
-            <a:lvl5pPr marL="914400" indent="0">
-              <a:buNone/>
-              <a:defRPr sz="1000"/>
+            <a:lvl5pPr marL="1005840" indent="0">
+              <a:buNone/>
+              <a:defRPr sz="1100"/>
             </a:lvl5pPr>
-            <a:lvl6pPr marL="1143000" indent="0">
-              <a:buNone/>
-              <a:defRPr sz="1000"/>
+            <a:lvl6pPr marL="1257300" indent="0">
+              <a:buNone/>
+              <a:defRPr sz="1100"/>
             </a:lvl6pPr>
-            <a:lvl7pPr marL="1371600" indent="0">
-              <a:buNone/>
-              <a:defRPr sz="1000"/>
+            <a:lvl7pPr marL="1508760" indent="0">
+              <a:buNone/>
+              <a:defRPr sz="1100"/>
             </a:lvl7pPr>
-            <a:lvl8pPr marL="1600200" indent="0">
-              <a:buNone/>
-              <a:defRPr sz="1000"/>
+            <a:lvl8pPr marL="1760220" indent="0">
+              <a:buNone/>
+              <a:defRPr sz="1100"/>
             </a:lvl8pPr>
-            <a:lvl9pPr marL="1828800" indent="0">
-              <a:buNone/>
-              <a:defRPr sz="1000"/>
+            <a:lvl9pPr marL="2011680" indent="0">
+              <a:buNone/>
+              <a:defRPr sz="1100"/>
             </a:lvl9pPr>
           </a:lstStyle>
           <a:p>
@@ -2280,8 +2285,8 @@
         </p:nvSpPr>
         <p:spPr>
           <a:xfrm>
-            <a:off x="440889" y="1028700"/>
-            <a:ext cx="2064424" cy="1905794"/>
+            <a:off x="346413" y="1508760"/>
+            <a:ext cx="1622048" cy="2795165"/>
           </a:xfrm>
         </p:spPr>
         <p:txBody>
@@ -2289,39 +2294,39 @@
           <a:lstStyle>
             <a:lvl1pPr marL="0" indent="0">
               <a:buNone/>
-              <a:defRPr sz="800"/>
+              <a:defRPr sz="880"/>
             </a:lvl1pPr>
-            <a:lvl2pPr marL="228600" indent="0">
-              <a:buNone/>
-              <a:defRPr sz="700"/>
+            <a:lvl2pPr marL="251460" indent="0">
+              <a:buNone/>
+              <a:defRPr sz="770"/>
             </a:lvl2pPr>
-            <a:lvl3pPr marL="457200" indent="0">
-              <a:buNone/>
-              <a:defRPr sz="600"/>
+            <a:lvl3pPr marL="502920" indent="0">
+              <a:buNone/>
+              <a:defRPr sz="660"/>
             </a:lvl3pPr>
-            <a:lvl4pPr marL="685800" indent="0">
-              <a:buNone/>
-              <a:defRPr sz="500"/>
+            <a:lvl4pPr marL="754380" indent="0">
+              <a:buNone/>
+              <a:defRPr sz="550"/>
             </a:lvl4pPr>
-            <a:lvl5pPr marL="914400" indent="0">
-              <a:buNone/>
-              <a:defRPr sz="500"/>
+            <a:lvl5pPr marL="1005840" indent="0">
+              <a:buNone/>
+              <a:defRPr sz="550"/>
             </a:lvl5pPr>
-            <a:lvl6pPr marL="1143000" indent="0">
-              <a:buNone/>
-              <a:defRPr sz="500"/>
+            <a:lvl6pPr marL="1257300" indent="0">
+              <a:buNone/>
+              <a:defRPr sz="550"/>
             </a:lvl6pPr>
-            <a:lvl7pPr marL="1371600" indent="0">
-              <a:buNone/>
-              <a:defRPr sz="500"/>
+            <a:lvl7pPr marL="1508760" indent="0">
+              <a:buNone/>
+              <a:defRPr sz="550"/>
             </a:lvl7pPr>
-            <a:lvl8pPr marL="1600200" indent="0">
-              <a:buNone/>
-              <a:defRPr sz="500"/>
+            <a:lvl8pPr marL="1760220" indent="0">
+              <a:buNone/>
+              <a:defRPr sz="550"/>
             </a:lvl8pPr>
-            <a:lvl9pPr marL="1828800" indent="0">
-              <a:buNone/>
-              <a:defRPr sz="500"/>
+            <a:lvl9pPr marL="2011680" indent="0">
+              <a:buNone/>
+              <a:defRPr sz="550"/>
             </a:lvl9pPr>
           </a:lstStyle>
           <a:p>
@@ -2348,9 +2353,9 @@
           <a:bodyPr/>
           <a:lstStyle/>
           <a:p>
-            <a:fld id="{9846A748-8F43-1948-93A2-534F40B96D47}" type="datetimeFigureOut">
+            <a:fld id="{1B7807B8-1B99-2143-B8FB-DB12FDB791D8}" type="datetimeFigureOut">
               <a:rPr lang="en-US" smtClean="0"/>
-              <a:t>6/1/26</a:t>
+              <a:t>6/17/26</a:t>
             </a:fld>
             <a:endParaRPr lang="en-US"/>
           </a:p>
@@ -2390,7 +2395,7 @@
           <a:bodyPr/>
           <a:lstStyle/>
           <a:p>
-            <a:fld id="{24F58B1C-EF32-7C42-A3EE-3DE6FFA71476}" type="slidenum">
+            <a:fld id="{F8FEC05D-4667-DB41-B9BC-E926823F0BF9}" type="slidenum">
               <a:rPr lang="en-US" smtClean="0"/>
               <a:t>‹#›</a:t>
             </a:fld>
@@ -2401,7 +2406,7 @@
     </p:spTree>
     <p:extLst>
       <p:ext uri="{BB962C8B-B14F-4D97-AF65-F5344CB8AC3E}">
-        <p14:creationId xmlns:p14="http://schemas.microsoft.com/office/powerpoint/2010/main" val="3344357637"/>
+        <p14:creationId xmlns:p14="http://schemas.microsoft.com/office/powerpoint/2010/main" val="4030394440"/>
       </p:ext>
     </p:extLst>
   </p:cSld>
@@ -2445,8 +2450,8 @@
         </p:nvSpPr>
         <p:spPr>
           <a:xfrm>
-            <a:off x="440055" y="182563"/>
-            <a:ext cx="5520690" cy="662782"/>
+            <a:off x="345758" y="267759"/>
+            <a:ext cx="4337685" cy="972080"/>
           </a:xfrm>
           <a:prstGeom prst="rect">
             <a:avLst/>
@@ -2478,8 +2483,8 @@
         </p:nvSpPr>
         <p:spPr>
           <a:xfrm>
-            <a:off x="440055" y="912812"/>
-            <a:ext cx="5520690" cy="2175669"/>
+            <a:off x="345758" y="1338792"/>
+            <a:ext cx="4337685" cy="3190981"/>
           </a:xfrm>
           <a:prstGeom prst="rect">
             <a:avLst/>
@@ -2540,8 +2545,8 @@
         </p:nvSpPr>
         <p:spPr>
           <a:xfrm>
-            <a:off x="440055" y="3178175"/>
-            <a:ext cx="1440180" cy="182563"/>
+            <a:off x="345758" y="4661325"/>
+            <a:ext cx="1131570" cy="267758"/>
           </a:xfrm>
           <a:prstGeom prst="rect">
             <a:avLst/>
@@ -2551,7 +2556,7 @@
           <a:bodyPr vert="horz" lIns="91440" tIns="45720" rIns="91440" bIns="45720" rtlCol="0" anchor="ctr"/>
           <a:lstStyle>
             <a:lvl1pPr algn="l">
-              <a:defRPr sz="600">
+              <a:defRPr sz="660">
                 <a:solidFill>
                   <a:schemeClr val="tx1">
                     <a:tint val="82000"/>
@@ -2561,9 +2566,9 @@
             </a:lvl1pPr>
           </a:lstStyle>
           <a:p>
-            <a:fld id="{9846A748-8F43-1948-93A2-534F40B96D47}" type="datetimeFigureOut">
+            <a:fld id="{1B7807B8-1B99-2143-B8FB-DB12FDB791D8}" type="datetimeFigureOut">
               <a:rPr lang="en-US" smtClean="0"/>
-              <a:t>6/1/26</a:t>
+              <a:t>6/17/26</a:t>
             </a:fld>
             <a:endParaRPr lang="en-US"/>
           </a:p>
@@ -2581,8 +2586,8 @@
         </p:nvSpPr>
         <p:spPr>
           <a:xfrm>
-            <a:off x="2120265" y="3178175"/>
-            <a:ext cx="2160270" cy="182563"/>
+            <a:off x="1665923" y="4661325"/>
+            <a:ext cx="1697355" cy="267758"/>
           </a:xfrm>
           <a:prstGeom prst="rect">
             <a:avLst/>
@@ -2592,7 +2597,7 @@
           <a:bodyPr vert="horz" lIns="91440" tIns="45720" rIns="91440" bIns="45720" rtlCol="0" anchor="ctr"/>
           <a:lstStyle>
             <a:lvl1pPr algn="ctr">
-              <a:defRPr sz="600">
+              <a:defRPr sz="660">
                 <a:solidFill>
                   <a:schemeClr val="tx1">
                     <a:tint val="82000"/>
@@ -2618,8 +2623,8 @@
         </p:nvSpPr>
         <p:spPr>
           <a:xfrm>
-            <a:off x="4520565" y="3178175"/>
-            <a:ext cx="1440180" cy="182563"/>
+            <a:off x="3551873" y="4661325"/>
+            <a:ext cx="1131570" cy="267758"/>
           </a:xfrm>
           <a:prstGeom prst="rect">
             <a:avLst/>
@@ -2629,7 +2634,7 @@
           <a:bodyPr vert="horz" lIns="91440" tIns="45720" rIns="91440" bIns="45720" rtlCol="0" anchor="ctr"/>
           <a:lstStyle>
             <a:lvl1pPr algn="r">
-              <a:defRPr sz="600">
+              <a:defRPr sz="660">
                 <a:solidFill>
                   <a:schemeClr val="tx1">
                     <a:tint val="82000"/>
@@ -2639,7 +2644,7 @@
             </a:lvl1pPr>
           </a:lstStyle>
           <a:p>
-            <a:fld id="{24F58B1C-EF32-7C42-A3EE-3DE6FFA71476}" type="slidenum">
+            <a:fld id="{F8FEC05D-4667-DB41-B9BC-E926823F0BF9}" type="slidenum">
               <a:rPr lang="en-US" smtClean="0"/>
               <a:t>‹#›</a:t>
             </a:fld>
@@ -2650,27 +2655,27 @@
     </p:spTree>
     <p:extLst>
       <p:ext uri="{BB962C8B-B14F-4D97-AF65-F5344CB8AC3E}">
-        <p14:creationId xmlns:p14="http://schemas.microsoft.com/office/powerpoint/2010/main" val="2054567180"/>
+        <p14:creationId xmlns:p14="http://schemas.microsoft.com/office/powerpoint/2010/main" val="4018609144"/>
       </p:ext>
     </p:extLst>
   </p:cSld>
   <p:clrMap bg1="lt1" tx1="dk1" bg2="lt2" tx2="dk2" accent1="accent1" accent2="accent2" accent3="accent3" accent4="accent4" accent5="accent5" accent6="accent6" hlink="hlink" folHlink="folHlink"/>
   <p:sldLayoutIdLst>
-    <p:sldLayoutId id="2147483685" r:id="rId1"/>
-    <p:sldLayoutId id="2147483686" r:id="rId2"/>
-    <p:sldLayoutId id="2147483687" r:id="rId3"/>
-    <p:sldLayoutId id="2147483688" r:id="rId4"/>
-    <p:sldLayoutId id="2147483689" r:id="rId5"/>
-    <p:sldLayoutId id="2147483690" r:id="rId6"/>
-    <p:sldLayoutId id="2147483691" r:id="rId7"/>
-    <p:sldLayoutId id="2147483692" r:id="rId8"/>
-    <p:sldLayoutId id="2147483693" r:id="rId9"/>
-    <p:sldLayoutId id="2147483694" r:id="rId10"/>
-    <p:sldLayoutId id="2147483695" r:id="rId11"/>
+    <p:sldLayoutId id="2147483661" r:id="rId1"/>
+    <p:sldLayoutId id="2147483662" r:id="rId2"/>
+    <p:sldLayoutId id="2147483663" r:id="rId3"/>
+    <p:sldLayoutId id="2147483664" r:id="rId4"/>
+    <p:sldLayoutId id="2147483665" r:id="rId5"/>
+    <p:sldLayoutId id="2147483666" r:id="rId6"/>
+    <p:sldLayoutId id="2147483667" r:id="rId7"/>
+    <p:sldLayoutId id="2147483668" r:id="rId8"/>
+    <p:sldLayoutId id="2147483669" r:id="rId9"/>
+    <p:sldLayoutId id="2147483670" r:id="rId10"/>
+    <p:sldLayoutId id="2147483671" r:id="rId11"/>
   </p:sldLayoutIdLst>
   <p:txStyles>
     <p:titleStyle>
-      <a:lvl1pPr algn="l" defTabSz="457200" rtl="0" eaLnBrk="1" latinLnBrk="0" hangingPunct="1">
+      <a:lvl1pPr algn="l" defTabSz="502920" rtl="0" eaLnBrk="1" latinLnBrk="0" hangingPunct="1">
         <a:lnSpc>
           <a:spcPct val="90000"/>
         </a:lnSpc>
@@ -2678,7 +2683,7 @@
           <a:spcPct val="0"/>
         </a:spcBef>
         <a:buNone/>
-        <a:defRPr sz="2200" kern="1200">
+        <a:defRPr sz="2420" kern="1200">
           <a:solidFill>
             <a:schemeClr val="tx1"/>
           </a:solidFill>
@@ -2689,16 +2694,16 @@
       </a:lvl1pPr>
     </p:titleStyle>
     <p:bodyStyle>
-      <a:lvl1pPr marL="114300" indent="-114300" algn="l" defTabSz="457200" rtl="0" eaLnBrk="1" latinLnBrk="0" hangingPunct="1">
+      <a:lvl1pPr marL="125730" indent="-125730" algn="l" defTabSz="502920" rtl="0" eaLnBrk="1" latinLnBrk="0" hangingPunct="1">
         <a:lnSpc>
           <a:spcPct val="90000"/>
         </a:lnSpc>
         <a:spcBef>
-          <a:spcPts val="500"/>
+          <a:spcPts val="550"/>
         </a:spcBef>
         <a:buFont typeface="Arial" panose="020B0604020202020204" pitchFamily="34" charset="0"/>
         <a:buChar char="•"/>
-        <a:defRPr sz="1400" kern="1200">
+        <a:defRPr sz="1540" kern="1200">
           <a:solidFill>
             <a:schemeClr val="tx1"/>
           </a:solidFill>
@@ -2707,16 +2712,16 @@
           <a:cs typeface="+mn-cs"/>
         </a:defRPr>
       </a:lvl1pPr>
-      <a:lvl2pPr marL="342900" indent="-114300" algn="l" defTabSz="457200" rtl="0" eaLnBrk="1" latinLnBrk="0" hangingPunct="1">
+      <a:lvl2pPr marL="377190" indent="-125730" algn="l" defTabSz="502920" rtl="0" eaLnBrk="1" latinLnBrk="0" hangingPunct="1">
         <a:lnSpc>
           <a:spcPct val="90000"/>
         </a:lnSpc>
         <a:spcBef>
-          <a:spcPts val="250"/>
+          <a:spcPts val="275"/>
         </a:spcBef>
         <a:buFont typeface="Arial" panose="020B0604020202020204" pitchFamily="34" charset="0"/>
         <a:buChar char="•"/>
-        <a:defRPr sz="1200" kern="1200">
+        <a:defRPr sz="1320" kern="1200">
           <a:solidFill>
             <a:schemeClr val="tx1"/>
           </a:solidFill>
@@ -2725,16 +2730,16 @@
           <a:cs typeface="+mn-cs"/>
         </a:defRPr>
       </a:lvl2pPr>
-      <a:lvl3pPr marL="571500" indent="-114300" algn="l" defTabSz="457200" rtl="0" eaLnBrk="1" latinLnBrk="0" hangingPunct="1">
+      <a:lvl3pPr marL="628650" indent="-125730" algn="l" defTabSz="502920" rtl="0" eaLnBrk="1" latinLnBrk="0" hangingPunct="1">
         <a:lnSpc>
           <a:spcPct val="90000"/>
         </a:lnSpc>
         <a:spcBef>
-          <a:spcPts val="250"/>
+          <a:spcPts val="275"/>
         </a:spcBef>
         <a:buFont typeface="Arial" panose="020B0604020202020204" pitchFamily="34" charset="0"/>
         <a:buChar char="•"/>
-        <a:defRPr sz="1000" kern="1200">
+        <a:defRPr sz="1100" kern="1200">
           <a:solidFill>
             <a:schemeClr val="tx1"/>
           </a:solidFill>
@@ -2743,16 +2748,16 @@
           <a:cs typeface="+mn-cs"/>
         </a:defRPr>
       </a:lvl3pPr>
-      <a:lvl4pPr marL="800100" indent="-114300" algn="l" defTabSz="457200" rtl="0" eaLnBrk="1" latinLnBrk="0" hangingPunct="1">
+      <a:lvl4pPr marL="880110" indent="-125730" algn="l" defTabSz="502920" rtl="0" eaLnBrk="1" latinLnBrk="0" hangingPunct="1">
         <a:lnSpc>
           <a:spcPct val="90000"/>
         </a:lnSpc>
         <a:spcBef>
-          <a:spcPts val="250"/>
+          <a:spcPts val="275"/>
         </a:spcBef>
         <a:buFont typeface="Arial" panose="020B0604020202020204" pitchFamily="34" charset="0"/>
         <a:buChar char="•"/>
-        <a:defRPr sz="900" kern="1200">
+        <a:defRPr sz="990" kern="1200">
           <a:solidFill>
             <a:schemeClr val="tx1"/>
           </a:solidFill>
@@ -2761,16 +2766,16 @@
           <a:cs typeface="+mn-cs"/>
         </a:defRPr>
       </a:lvl4pPr>
-      <a:lvl5pPr marL="1028700" indent="-114300" algn="l" defTabSz="457200" rtl="0" eaLnBrk="1" latinLnBrk="0" hangingPunct="1">
+      <a:lvl5pPr marL="1131570" indent="-125730" algn="l" defTabSz="502920" rtl="0" eaLnBrk="1" latinLnBrk="0" hangingPunct="1">
         <a:lnSpc>
           <a:spcPct val="90000"/>
         </a:lnSpc>
         <a:spcBef>
-          <a:spcPts val="250"/>
+          <a:spcPts val="275"/>
         </a:spcBef>
         <a:buFont typeface="Arial" panose="020B0604020202020204" pitchFamily="34" charset="0"/>
         <a:buChar char="•"/>
-        <a:defRPr sz="900" kern="1200">
+        <a:defRPr sz="990" kern="1200">
           <a:solidFill>
             <a:schemeClr val="tx1"/>
           </a:solidFill>
@@ -2779,16 +2784,16 @@
           <a:cs typeface="+mn-cs"/>
         </a:defRPr>
       </a:lvl5pPr>
-      <a:lvl6pPr marL="1257300" indent="-114300" algn="l" defTabSz="457200" rtl="0" eaLnBrk="1" latinLnBrk="0" hangingPunct="1">
+      <a:lvl6pPr marL="1383030" indent="-125730" algn="l" defTabSz="502920" rtl="0" eaLnBrk="1" latinLnBrk="0" hangingPunct="1">
         <a:lnSpc>
           <a:spcPct val="90000"/>
         </a:lnSpc>
         <a:spcBef>
-          <a:spcPts val="250"/>
+          <a:spcPts val="275"/>
         </a:spcBef>
         <a:buFont typeface="Arial" panose="020B0604020202020204" pitchFamily="34" charset="0"/>
         <a:buChar char="•"/>
-        <a:defRPr sz="900" kern="1200">
+        <a:defRPr sz="990" kern="1200">
           <a:solidFill>
             <a:schemeClr val="tx1"/>
           </a:solidFill>
@@ -2797,16 +2802,16 @@
           <a:cs typeface="+mn-cs"/>
         </a:defRPr>
       </a:lvl6pPr>
-      <a:lvl7pPr marL="1485900" indent="-114300" algn="l" defTabSz="457200" rtl="0" eaLnBrk="1" latinLnBrk="0" hangingPunct="1">
+      <a:lvl7pPr marL="1634490" indent="-125730" algn="l" defTabSz="502920" rtl="0" eaLnBrk="1" latinLnBrk="0" hangingPunct="1">
         <a:lnSpc>
           <a:spcPct val="90000"/>
         </a:lnSpc>
         <a:spcBef>
-          <a:spcPts val="250"/>
+          <a:spcPts val="275"/>
         </a:spcBef>
         <a:buFont typeface="Arial" panose="020B0604020202020204" pitchFamily="34" charset="0"/>
         <a:buChar char="•"/>
-        <a:defRPr sz="900" kern="1200">
+        <a:defRPr sz="990" kern="1200">
           <a:solidFill>
             <a:schemeClr val="tx1"/>
           </a:solidFill>
@@ -2815,16 +2820,16 @@
           <a:cs typeface="+mn-cs"/>
         </a:defRPr>
       </a:lvl7pPr>
-      <a:lvl8pPr marL="1714500" indent="-114300" algn="l" defTabSz="457200" rtl="0" eaLnBrk="1" latinLnBrk="0" hangingPunct="1">
+      <a:lvl8pPr marL="1885950" indent="-125730" algn="l" defTabSz="502920" rtl="0" eaLnBrk="1" latinLnBrk="0" hangingPunct="1">
         <a:lnSpc>
           <a:spcPct val="90000"/>
         </a:lnSpc>
         <a:spcBef>
-          <a:spcPts val="250"/>
+          <a:spcPts val="275"/>
         </a:spcBef>
         <a:buFont typeface="Arial" panose="020B0604020202020204" pitchFamily="34" charset="0"/>
         <a:buChar char="•"/>
-        <a:defRPr sz="900" kern="1200">
+        <a:defRPr sz="990" kern="1200">
           <a:solidFill>
             <a:schemeClr val="tx1"/>
           </a:solidFill>
@@ -2833,16 +2838,16 @@
           <a:cs typeface="+mn-cs"/>
         </a:defRPr>
       </a:lvl8pPr>
-      <a:lvl9pPr marL="1943100" indent="-114300" algn="l" defTabSz="457200" rtl="0" eaLnBrk="1" latinLnBrk="0" hangingPunct="1">
+      <a:lvl9pPr marL="2137410" indent="-125730" algn="l" defTabSz="502920" rtl="0" eaLnBrk="1" latinLnBrk="0" hangingPunct="1">
         <a:lnSpc>
           <a:spcPct val="90000"/>
         </a:lnSpc>
         <a:spcBef>
-          <a:spcPts val="250"/>
+          <a:spcPts val="275"/>
         </a:spcBef>
         <a:buFont typeface="Arial" panose="020B0604020202020204" pitchFamily="34" charset="0"/>
         <a:buChar char="•"/>
-        <a:defRPr sz="900" kern="1200">
+        <a:defRPr sz="990" kern="1200">
           <a:solidFill>
             <a:schemeClr val="tx1"/>
           </a:solidFill>
@@ -2856,8 +2861,8 @@
       <a:defPPr>
         <a:defRPr lang="en-US"/>
       </a:defPPr>
-      <a:lvl1pPr marL="0" algn="l" defTabSz="457200" rtl="0" eaLnBrk="1" latinLnBrk="0" hangingPunct="1">
-        <a:defRPr sz="900" kern="1200">
+      <a:lvl1pPr marL="0" algn="l" defTabSz="502920" rtl="0" eaLnBrk="1" latinLnBrk="0" hangingPunct="1">
+        <a:defRPr sz="990" kern="1200">
           <a:solidFill>
             <a:schemeClr val="tx1"/>
           </a:solidFill>
@@ -2866,8 +2871,8 @@
           <a:cs typeface="+mn-cs"/>
         </a:defRPr>
       </a:lvl1pPr>
-      <a:lvl2pPr marL="228600" algn="l" defTabSz="457200" rtl="0" eaLnBrk="1" latinLnBrk="0" hangingPunct="1">
-        <a:defRPr sz="900" kern="1200">
+      <a:lvl2pPr marL="251460" algn="l" defTabSz="502920" rtl="0" eaLnBrk="1" latinLnBrk="0" hangingPunct="1">
+        <a:defRPr sz="990" kern="1200">
           <a:solidFill>
             <a:schemeClr val="tx1"/>
           </a:solidFill>
@@ -2876,8 +2881,8 @@
           <a:cs typeface="+mn-cs"/>
         </a:defRPr>
       </a:lvl2pPr>
-      <a:lvl3pPr marL="457200" algn="l" defTabSz="457200" rtl="0" eaLnBrk="1" latinLnBrk="0" hangingPunct="1">
-        <a:defRPr sz="900" kern="1200">
+      <a:lvl3pPr marL="502920" algn="l" defTabSz="502920" rtl="0" eaLnBrk="1" latinLnBrk="0" hangingPunct="1">
+        <a:defRPr sz="990" kern="1200">
           <a:solidFill>
             <a:schemeClr val="tx1"/>
           </a:solidFill>
@@ -2886,8 +2891,8 @@
           <a:cs typeface="+mn-cs"/>
         </a:defRPr>
       </a:lvl3pPr>
-      <a:lvl4pPr marL="685800" algn="l" defTabSz="457200" rtl="0" eaLnBrk="1" latinLnBrk="0" hangingPunct="1">
-        <a:defRPr sz="900" kern="1200">
+      <a:lvl4pPr marL="754380" algn="l" defTabSz="502920" rtl="0" eaLnBrk="1" latinLnBrk="0" hangingPunct="1">
+        <a:defRPr sz="990" kern="1200">
           <a:solidFill>
             <a:schemeClr val="tx1"/>
           </a:solidFill>
@@ -2896,8 +2901,8 @@
           <a:cs typeface="+mn-cs"/>
         </a:defRPr>
       </a:lvl4pPr>
-      <a:lvl5pPr marL="914400" algn="l" defTabSz="457200" rtl="0" eaLnBrk="1" latinLnBrk="0" hangingPunct="1">
-        <a:defRPr sz="900" kern="1200">
+      <a:lvl5pPr marL="1005840" algn="l" defTabSz="502920" rtl="0" eaLnBrk="1" latinLnBrk="0" hangingPunct="1">
+        <a:defRPr sz="990" kern="1200">
           <a:solidFill>
             <a:schemeClr val="tx1"/>
           </a:solidFill>
@@ -2906,8 +2911,8 @@
           <a:cs typeface="+mn-cs"/>
         </a:defRPr>
       </a:lvl5pPr>
-      <a:lvl6pPr marL="1143000" algn="l" defTabSz="457200" rtl="0" eaLnBrk="1" latinLnBrk="0" hangingPunct="1">
-        <a:defRPr sz="900" kern="1200">
+      <a:lvl6pPr marL="1257300" algn="l" defTabSz="502920" rtl="0" eaLnBrk="1" latinLnBrk="0" hangingPunct="1">
+        <a:defRPr sz="990" kern="1200">
           <a:solidFill>
             <a:schemeClr val="tx1"/>
           </a:solidFill>
@@ -2916,8 +2921,8 @@
           <a:cs typeface="+mn-cs"/>
         </a:defRPr>
       </a:lvl6pPr>
-      <a:lvl7pPr marL="1371600" algn="l" defTabSz="457200" rtl="0" eaLnBrk="1" latinLnBrk="0" hangingPunct="1">
-        <a:defRPr sz="900" kern="1200">
+      <a:lvl7pPr marL="1508760" algn="l" defTabSz="502920" rtl="0" eaLnBrk="1" latinLnBrk="0" hangingPunct="1">
+        <a:defRPr sz="990" kern="1200">
           <a:solidFill>
             <a:schemeClr val="tx1"/>
           </a:solidFill>
@@ -2926,8 +2931,8 @@
           <a:cs typeface="+mn-cs"/>
         </a:defRPr>
       </a:lvl7pPr>
-      <a:lvl8pPr marL="1600200" algn="l" defTabSz="457200" rtl="0" eaLnBrk="1" latinLnBrk="0" hangingPunct="1">
-        <a:defRPr sz="900" kern="1200">
+      <a:lvl8pPr marL="1760220" algn="l" defTabSz="502920" rtl="0" eaLnBrk="1" latinLnBrk="0" hangingPunct="1">
+        <a:defRPr sz="990" kern="1200">
           <a:solidFill>
             <a:schemeClr val="tx1"/>
           </a:solidFill>
@@ -2936,8 +2941,8 @@
           <a:cs typeface="+mn-cs"/>
         </a:defRPr>
       </a:lvl8pPr>
-      <a:lvl9pPr marL="1828800" algn="l" defTabSz="457200" rtl="0" eaLnBrk="1" latinLnBrk="0" hangingPunct="1">
-        <a:defRPr sz="900" kern="1200">
+      <a:lvl9pPr marL="2011680" algn="l" defTabSz="502920" rtl="0" eaLnBrk="1" latinLnBrk="0" hangingPunct="1">
+        <a:defRPr sz="990" kern="1200">
           <a:solidFill>
             <a:schemeClr val="tx1"/>
           </a:solidFill>
@@ -2970,10 +2975,10 @@
       </p:grpSpPr>
       <p:pic>
         <p:nvPicPr>
-          <p:cNvPr id="7" name="Picture 6">
+          <p:cNvPr id="5" name="Picture 4">
             <a:extLst>
               <a:ext uri="{FF2B5EF4-FFF2-40B4-BE49-F238E27FC236}">
-                <a16:creationId xmlns:a16="http://schemas.microsoft.com/office/drawing/2014/main" id="{B76E1AC9-9214-CDD9-9DB4-814D17CF991C}"/>
+                <a16:creationId xmlns:a16="http://schemas.microsoft.com/office/drawing/2014/main" id="{5F09C46C-198C-08A6-0053-8F60CC752612}"/>
               </a:ext>
             </a:extLst>
           </p:cNvPr>
@@ -2984,1288 +2989,127 @@
         </p:nvPicPr>
         <p:blipFill>
           <a:blip r:embed="rId2"/>
-          <a:stretch>
-            <a:fillRect/>
-          </a:stretch>
+          <a:srcRect/>
+          <a:stretch/>
         </p:blipFill>
         <p:spPr>
           <a:xfrm>
-            <a:off x="0" y="457200"/>
-            <a:ext cx="6400800" cy="2971800"/>
+            <a:off x="0" y="0"/>
+            <a:ext cx="5029200" cy="5029200"/>
           </a:xfrm>
           <a:prstGeom prst="rect">
             <a:avLst/>
           </a:prstGeom>
         </p:spPr>
       </p:pic>
-      <p:grpSp>
-        <p:nvGrpSpPr>
-          <p:cNvPr id="8" name="Group 7">
+      <p:sp>
+        <p:nvSpPr>
+          <p:cNvPr id="6" name="Triangle 5">
             <a:extLst>
               <a:ext uri="{FF2B5EF4-FFF2-40B4-BE49-F238E27FC236}">
-                <a16:creationId xmlns:a16="http://schemas.microsoft.com/office/drawing/2014/main" id="{14DD6040-11E8-6D3C-30CC-C485E9DE9396}"/>
+                <a16:creationId xmlns:a16="http://schemas.microsoft.com/office/drawing/2014/main" id="{9690494D-3533-6625-494C-7A242B0C023E}"/>
               </a:ext>
             </a:extLst>
           </p:cNvPr>
-          <p:cNvGrpSpPr/>
+          <p:cNvSpPr/>
           <p:nvPr/>
-        </p:nvGrpSpPr>
-        <p:grpSpPr>
+        </p:nvSpPr>
+        <p:spPr>
           <a:xfrm>
-            <a:off x="993100" y="161526"/>
-            <a:ext cx="1689543" cy="387626"/>
-            <a:chOff x="2714324" y="1905801"/>
-            <a:chExt cx="1689543" cy="387626"/>
+            <a:off x="3171217" y="159534"/>
+            <a:ext cx="85604" cy="73797"/>
           </a:xfrm>
-        </p:grpSpPr>
-        <p:grpSp>
-          <p:nvGrpSpPr>
-            <p:cNvPr id="9" name="Group 8">
-              <a:extLst>
-                <a:ext uri="{FF2B5EF4-FFF2-40B4-BE49-F238E27FC236}">
-                  <a16:creationId xmlns:a16="http://schemas.microsoft.com/office/drawing/2014/main" id="{971D529E-68F1-7338-616A-AA1356BE0990}"/>
-                </a:ext>
-              </a:extLst>
-            </p:cNvPr>
-            <p:cNvGrpSpPr/>
-            <p:nvPr/>
-          </p:nvGrpSpPr>
-          <p:grpSpPr>
-            <a:xfrm>
-              <a:off x="2714324" y="1905801"/>
-              <a:ext cx="1689543" cy="274531"/>
-              <a:chOff x="2406316" y="1795317"/>
-              <a:chExt cx="1689543" cy="385014"/>
-            </a:xfrm>
-          </p:grpSpPr>
-          <p:sp>
-            <p:nvSpPr>
-              <p:cNvPr id="11" name="Rectangle 10">
-                <a:extLst>
-                  <a:ext uri="{FF2B5EF4-FFF2-40B4-BE49-F238E27FC236}">
-                    <a16:creationId xmlns:a16="http://schemas.microsoft.com/office/drawing/2014/main" id="{4B281405-6B5A-095F-4332-EF831D7F4878}"/>
-                  </a:ext>
-                </a:extLst>
-              </p:cNvPr>
-              <p:cNvSpPr/>
-              <p:nvPr/>
-            </p:nvSpPr>
-            <p:spPr>
-              <a:xfrm>
-                <a:off x="2406316" y="1795320"/>
-                <a:ext cx="187727" cy="385011"/>
-              </a:xfrm>
-              <a:prstGeom prst="rect">
-                <a:avLst/>
-              </a:prstGeom>
-              <a:solidFill>
-                <a:srgbClr val="E8E9FD"/>
-              </a:solidFill>
-              <a:ln w="12700">
-                <a:solidFill>
-                  <a:schemeClr val="tx1">
-                    <a:lumMod val="75000"/>
-                    <a:lumOff val="25000"/>
-                  </a:schemeClr>
-                </a:solidFill>
-              </a:ln>
-            </p:spPr>
-            <p:style>
-              <a:lnRef idx="2">
-                <a:schemeClr val="accent1">
-                  <a:shade val="15000"/>
-                </a:schemeClr>
-              </a:lnRef>
-              <a:fillRef idx="1">
-                <a:schemeClr val="accent1"/>
-              </a:fillRef>
-              <a:effectRef idx="0">
-                <a:schemeClr val="accent1"/>
-              </a:effectRef>
-              <a:fontRef idx="minor">
-                <a:schemeClr val="lt1"/>
-              </a:fontRef>
-            </p:style>
-            <p:txBody>
-              <a:bodyPr rtlCol="0" anchor="ctr"/>
-              <a:lstStyle/>
-              <a:p>
-                <a:pPr algn="ctr"/>
-                <a:endParaRPr lang="en-US"/>
-              </a:p>
-            </p:txBody>
-          </p:sp>
-          <p:sp>
-            <p:nvSpPr>
-              <p:cNvPr id="12" name="Rectangle 11">
-                <a:extLst>
-                  <a:ext uri="{FF2B5EF4-FFF2-40B4-BE49-F238E27FC236}">
-                    <a16:creationId xmlns:a16="http://schemas.microsoft.com/office/drawing/2014/main" id="{4CF88B52-F43B-9A43-EFD2-CA5D533B851D}"/>
-                  </a:ext>
-                </a:extLst>
-              </p:cNvPr>
-              <p:cNvSpPr/>
-              <p:nvPr/>
-            </p:nvSpPr>
-            <p:spPr>
-              <a:xfrm>
-                <a:off x="2594043" y="1795319"/>
-                <a:ext cx="187727" cy="385011"/>
-              </a:xfrm>
-              <a:prstGeom prst="rect">
-                <a:avLst/>
-              </a:prstGeom>
-              <a:solidFill>
-                <a:srgbClr val="E8E9FD"/>
-              </a:solidFill>
-              <a:ln w="12700">
-                <a:solidFill>
-                  <a:schemeClr val="tx1">
-                    <a:lumMod val="75000"/>
-                    <a:lumOff val="25000"/>
-                  </a:schemeClr>
-                </a:solidFill>
-              </a:ln>
-            </p:spPr>
-            <p:style>
-              <a:lnRef idx="2">
-                <a:schemeClr val="accent1">
-                  <a:shade val="15000"/>
-                </a:schemeClr>
-              </a:lnRef>
-              <a:fillRef idx="1">
-                <a:schemeClr val="accent1"/>
-              </a:fillRef>
-              <a:effectRef idx="0">
-                <a:schemeClr val="accent1"/>
-              </a:effectRef>
-              <a:fontRef idx="minor">
-                <a:schemeClr val="lt1"/>
-              </a:fontRef>
-            </p:style>
-            <p:txBody>
-              <a:bodyPr rtlCol="0" anchor="ctr"/>
-              <a:lstStyle/>
-              <a:p>
-                <a:pPr algn="ctr"/>
-                <a:endParaRPr lang="en-US"/>
-              </a:p>
-            </p:txBody>
-          </p:sp>
-          <p:sp>
-            <p:nvSpPr>
-              <p:cNvPr id="13" name="Rectangle 12">
-                <a:extLst>
-                  <a:ext uri="{FF2B5EF4-FFF2-40B4-BE49-F238E27FC236}">
-                    <a16:creationId xmlns:a16="http://schemas.microsoft.com/office/drawing/2014/main" id="{46F91F0A-8074-403B-62CD-6897287E7DBD}"/>
-                  </a:ext>
-                </a:extLst>
-              </p:cNvPr>
-              <p:cNvSpPr/>
-              <p:nvPr/>
-            </p:nvSpPr>
-            <p:spPr>
-              <a:xfrm>
-                <a:off x="2781770" y="1795319"/>
-                <a:ext cx="187727" cy="385011"/>
-              </a:xfrm>
-              <a:prstGeom prst="rect">
-                <a:avLst/>
-              </a:prstGeom>
-              <a:solidFill>
-                <a:srgbClr val="E8E9FD"/>
-              </a:solidFill>
-              <a:ln w="12700">
-                <a:solidFill>
-                  <a:schemeClr val="tx1">
-                    <a:lumMod val="75000"/>
-                    <a:lumOff val="25000"/>
-                  </a:schemeClr>
-                </a:solidFill>
-              </a:ln>
-            </p:spPr>
-            <p:style>
-              <a:lnRef idx="2">
-                <a:schemeClr val="accent1">
-                  <a:shade val="15000"/>
-                </a:schemeClr>
-              </a:lnRef>
-              <a:fillRef idx="1">
-                <a:schemeClr val="accent1"/>
-              </a:fillRef>
-              <a:effectRef idx="0">
-                <a:schemeClr val="accent1"/>
-              </a:effectRef>
-              <a:fontRef idx="minor">
-                <a:schemeClr val="lt1"/>
-              </a:fontRef>
-            </p:style>
-            <p:txBody>
-              <a:bodyPr rtlCol="0" anchor="ctr"/>
-              <a:lstStyle/>
-              <a:p>
-                <a:pPr algn="ctr"/>
-                <a:endParaRPr lang="en-US"/>
-              </a:p>
-            </p:txBody>
-          </p:sp>
-          <p:sp>
-            <p:nvSpPr>
-              <p:cNvPr id="14" name="Rectangle 13">
-                <a:extLst>
-                  <a:ext uri="{FF2B5EF4-FFF2-40B4-BE49-F238E27FC236}">
-                    <a16:creationId xmlns:a16="http://schemas.microsoft.com/office/drawing/2014/main" id="{379DAF2C-A3D7-60A4-A9B2-6665F1DC35AD}"/>
-                  </a:ext>
-                </a:extLst>
-              </p:cNvPr>
-              <p:cNvSpPr/>
-              <p:nvPr/>
-            </p:nvSpPr>
-            <p:spPr>
-              <a:xfrm>
-                <a:off x="2969497" y="1795319"/>
-                <a:ext cx="187727" cy="385011"/>
-              </a:xfrm>
-              <a:prstGeom prst="rect">
-                <a:avLst/>
-              </a:prstGeom>
-              <a:solidFill>
-                <a:srgbClr val="E8E9FD"/>
-              </a:solidFill>
-              <a:ln w="12700">
-                <a:solidFill>
-                  <a:schemeClr val="tx1">
-                    <a:lumMod val="75000"/>
-                    <a:lumOff val="25000"/>
-                  </a:schemeClr>
-                </a:solidFill>
-              </a:ln>
-            </p:spPr>
-            <p:style>
-              <a:lnRef idx="2">
-                <a:schemeClr val="accent1">
-                  <a:shade val="15000"/>
-                </a:schemeClr>
-              </a:lnRef>
-              <a:fillRef idx="1">
-                <a:schemeClr val="accent1"/>
-              </a:fillRef>
-              <a:effectRef idx="0">
-                <a:schemeClr val="accent1"/>
-              </a:effectRef>
-              <a:fontRef idx="minor">
-                <a:schemeClr val="lt1"/>
-              </a:fontRef>
-            </p:style>
-            <p:txBody>
-              <a:bodyPr rtlCol="0" anchor="ctr"/>
-              <a:lstStyle/>
-              <a:p>
-                <a:pPr algn="ctr"/>
-                <a:endParaRPr lang="en-US"/>
-              </a:p>
-            </p:txBody>
-          </p:sp>
-          <p:sp>
-            <p:nvSpPr>
-              <p:cNvPr id="15" name="Rectangle 14">
-                <a:extLst>
-                  <a:ext uri="{FF2B5EF4-FFF2-40B4-BE49-F238E27FC236}">
-                    <a16:creationId xmlns:a16="http://schemas.microsoft.com/office/drawing/2014/main" id="{6A5D9F16-72AE-7267-C59F-E5685218A29C}"/>
-                  </a:ext>
-                </a:extLst>
-              </p:cNvPr>
-              <p:cNvSpPr/>
-              <p:nvPr/>
-            </p:nvSpPr>
-            <p:spPr>
-              <a:xfrm>
-                <a:off x="3157224" y="1795318"/>
-                <a:ext cx="187727" cy="385011"/>
-              </a:xfrm>
-              <a:prstGeom prst="rect">
-                <a:avLst/>
-              </a:prstGeom>
-              <a:solidFill>
-                <a:srgbClr val="E8E9FD"/>
-              </a:solidFill>
-              <a:ln w="12700">
-                <a:solidFill>
-                  <a:schemeClr val="tx1">
-                    <a:lumMod val="75000"/>
-                    <a:lumOff val="25000"/>
-                  </a:schemeClr>
-                </a:solidFill>
-              </a:ln>
-            </p:spPr>
-            <p:style>
-              <a:lnRef idx="2">
-                <a:schemeClr val="accent1">
-                  <a:shade val="15000"/>
-                </a:schemeClr>
-              </a:lnRef>
-              <a:fillRef idx="1">
-                <a:schemeClr val="accent1"/>
-              </a:fillRef>
-              <a:effectRef idx="0">
-                <a:schemeClr val="accent1"/>
-              </a:effectRef>
-              <a:fontRef idx="minor">
-                <a:schemeClr val="lt1"/>
-              </a:fontRef>
-            </p:style>
-            <p:txBody>
-              <a:bodyPr rtlCol="0" anchor="ctr"/>
-              <a:lstStyle/>
-              <a:p>
-                <a:pPr algn="ctr"/>
-                <a:endParaRPr lang="en-US"/>
-              </a:p>
-            </p:txBody>
-          </p:sp>
-          <p:sp>
-            <p:nvSpPr>
-              <p:cNvPr id="16" name="Rectangle 15">
-                <a:extLst>
-                  <a:ext uri="{FF2B5EF4-FFF2-40B4-BE49-F238E27FC236}">
-                    <a16:creationId xmlns:a16="http://schemas.microsoft.com/office/drawing/2014/main" id="{0CA6218E-0031-5F59-7A1F-961D6AE3D033}"/>
-                  </a:ext>
-                </a:extLst>
-              </p:cNvPr>
-              <p:cNvSpPr/>
-              <p:nvPr/>
-            </p:nvSpPr>
-            <p:spPr>
-              <a:xfrm>
-                <a:off x="3344951" y="1795318"/>
-                <a:ext cx="187727" cy="385011"/>
-              </a:xfrm>
-              <a:prstGeom prst="rect">
-                <a:avLst/>
-              </a:prstGeom>
-              <a:solidFill>
-                <a:srgbClr val="E8E9FD"/>
-              </a:solidFill>
-              <a:ln w="12700">
-                <a:solidFill>
-                  <a:schemeClr val="tx1">
-                    <a:lumMod val="75000"/>
-                    <a:lumOff val="25000"/>
-                  </a:schemeClr>
-                </a:solidFill>
-              </a:ln>
-            </p:spPr>
-            <p:style>
-              <a:lnRef idx="2">
-                <a:schemeClr val="accent1">
-                  <a:shade val="15000"/>
-                </a:schemeClr>
-              </a:lnRef>
-              <a:fillRef idx="1">
-                <a:schemeClr val="accent1"/>
-              </a:fillRef>
-              <a:effectRef idx="0">
-                <a:schemeClr val="accent1"/>
-              </a:effectRef>
-              <a:fontRef idx="minor">
-                <a:schemeClr val="lt1"/>
-              </a:fontRef>
-            </p:style>
-            <p:txBody>
-              <a:bodyPr rtlCol="0" anchor="ctr"/>
-              <a:lstStyle/>
-              <a:p>
-                <a:pPr algn="ctr"/>
-                <a:endParaRPr lang="en-US"/>
-              </a:p>
-            </p:txBody>
-          </p:sp>
-          <p:sp>
-            <p:nvSpPr>
-              <p:cNvPr id="17" name="Rectangle 16">
-                <a:extLst>
-                  <a:ext uri="{FF2B5EF4-FFF2-40B4-BE49-F238E27FC236}">
-                    <a16:creationId xmlns:a16="http://schemas.microsoft.com/office/drawing/2014/main" id="{C2581066-7202-378D-84B5-2ADA4E074652}"/>
-                  </a:ext>
-                </a:extLst>
-              </p:cNvPr>
-              <p:cNvSpPr/>
-              <p:nvPr/>
-            </p:nvSpPr>
-            <p:spPr>
-              <a:xfrm>
-                <a:off x="3532678" y="1795318"/>
-                <a:ext cx="187727" cy="385011"/>
-              </a:xfrm>
-              <a:prstGeom prst="rect">
-                <a:avLst/>
-              </a:prstGeom>
-              <a:solidFill>
-                <a:srgbClr val="E8E9FD"/>
-              </a:solidFill>
-              <a:ln w="12700">
-                <a:solidFill>
-                  <a:schemeClr val="tx1">
-                    <a:lumMod val="75000"/>
-                    <a:lumOff val="25000"/>
-                  </a:schemeClr>
-                </a:solidFill>
-              </a:ln>
-            </p:spPr>
-            <p:style>
-              <a:lnRef idx="2">
-                <a:schemeClr val="accent1">
-                  <a:shade val="15000"/>
-                </a:schemeClr>
-              </a:lnRef>
-              <a:fillRef idx="1">
-                <a:schemeClr val="accent1"/>
-              </a:fillRef>
-              <a:effectRef idx="0">
-                <a:schemeClr val="accent1"/>
-              </a:effectRef>
-              <a:fontRef idx="minor">
-                <a:schemeClr val="lt1"/>
-              </a:fontRef>
-            </p:style>
-            <p:txBody>
-              <a:bodyPr rtlCol="0" anchor="ctr"/>
-              <a:lstStyle/>
-              <a:p>
-                <a:pPr algn="ctr"/>
-                <a:endParaRPr lang="en-US"/>
-              </a:p>
-            </p:txBody>
-          </p:sp>
-          <p:sp>
-            <p:nvSpPr>
-              <p:cNvPr id="18" name="Rectangle 17">
-                <a:extLst>
-                  <a:ext uri="{FF2B5EF4-FFF2-40B4-BE49-F238E27FC236}">
-                    <a16:creationId xmlns:a16="http://schemas.microsoft.com/office/drawing/2014/main" id="{921AB5F2-920F-91CD-A714-3DF6CE47047C}"/>
-                  </a:ext>
-                </a:extLst>
-              </p:cNvPr>
-              <p:cNvSpPr/>
-              <p:nvPr/>
-            </p:nvSpPr>
-            <p:spPr>
-              <a:xfrm>
-                <a:off x="3720405" y="1795317"/>
-                <a:ext cx="187727" cy="385011"/>
-              </a:xfrm>
-              <a:prstGeom prst="rect">
-                <a:avLst/>
-              </a:prstGeom>
-              <a:solidFill>
-                <a:srgbClr val="D8AACE"/>
-              </a:solidFill>
-              <a:ln w="12700">
-                <a:solidFill>
-                  <a:schemeClr val="tx1">
-                    <a:lumMod val="75000"/>
-                    <a:lumOff val="25000"/>
-                  </a:schemeClr>
-                </a:solidFill>
-              </a:ln>
-            </p:spPr>
-            <p:style>
-              <a:lnRef idx="2">
-                <a:schemeClr val="accent1">
-                  <a:shade val="15000"/>
-                </a:schemeClr>
-              </a:lnRef>
-              <a:fillRef idx="1">
-                <a:schemeClr val="accent1"/>
-              </a:fillRef>
-              <a:effectRef idx="0">
-                <a:schemeClr val="accent1"/>
-              </a:effectRef>
-              <a:fontRef idx="minor">
-                <a:schemeClr val="lt1"/>
-              </a:fontRef>
-            </p:style>
-            <p:txBody>
-              <a:bodyPr rtlCol="0" anchor="ctr"/>
-              <a:lstStyle/>
-              <a:p>
-                <a:pPr algn="ctr"/>
-                <a:endParaRPr lang="en-US"/>
-              </a:p>
-            </p:txBody>
-          </p:sp>
-          <p:sp>
-            <p:nvSpPr>
-              <p:cNvPr id="19" name="Rectangle 18">
-                <a:extLst>
-                  <a:ext uri="{FF2B5EF4-FFF2-40B4-BE49-F238E27FC236}">
-                    <a16:creationId xmlns:a16="http://schemas.microsoft.com/office/drawing/2014/main" id="{1A5D3411-6454-D94E-3724-85219199E636}"/>
-                  </a:ext>
-                </a:extLst>
-              </p:cNvPr>
-              <p:cNvSpPr/>
-              <p:nvPr/>
-            </p:nvSpPr>
-            <p:spPr>
-              <a:xfrm>
-                <a:off x="3908132" y="1795317"/>
-                <a:ext cx="187727" cy="385011"/>
-              </a:xfrm>
-              <a:prstGeom prst="rect">
-                <a:avLst/>
-              </a:prstGeom>
-              <a:solidFill>
-                <a:srgbClr val="C4BBEC"/>
-              </a:solidFill>
-              <a:ln w="12700">
-                <a:solidFill>
-                  <a:schemeClr val="tx1">
-                    <a:lumMod val="75000"/>
-                    <a:lumOff val="25000"/>
-                  </a:schemeClr>
-                </a:solidFill>
-              </a:ln>
-            </p:spPr>
-            <p:style>
-              <a:lnRef idx="2">
-                <a:schemeClr val="accent1">
-                  <a:shade val="15000"/>
-                </a:schemeClr>
-              </a:lnRef>
-              <a:fillRef idx="1">
-                <a:schemeClr val="accent1"/>
-              </a:fillRef>
-              <a:effectRef idx="0">
-                <a:schemeClr val="accent1"/>
-              </a:effectRef>
-              <a:fontRef idx="minor">
-                <a:schemeClr val="lt1"/>
-              </a:fontRef>
-            </p:style>
-            <p:txBody>
-              <a:bodyPr rtlCol="0" anchor="ctr"/>
-              <a:lstStyle/>
-              <a:p>
-                <a:pPr algn="ctr"/>
-                <a:endParaRPr lang="en-US"/>
-              </a:p>
-            </p:txBody>
-          </p:sp>
-        </p:grpSp>
-        <p:cxnSp>
-          <p:nvCxnSpPr>
-            <p:cNvPr id="10" name="Straight Arrow Connector 9">
-              <a:extLst>
-                <a:ext uri="{FF2B5EF4-FFF2-40B4-BE49-F238E27FC236}">
-                  <a16:creationId xmlns:a16="http://schemas.microsoft.com/office/drawing/2014/main" id="{959CA90F-2CA1-1246-76E3-9E180C818AF6}"/>
-                </a:ext>
-              </a:extLst>
-            </p:cNvPr>
-            <p:cNvCxnSpPr/>
-            <p:nvPr/>
-          </p:nvCxnSpPr>
-          <p:spPr>
-            <a:xfrm flipV="1">
-              <a:off x="2805765" y="2067233"/>
-              <a:ext cx="0" cy="226194"/>
-            </a:xfrm>
-            <a:prstGeom prst="straightConnector1">
-              <a:avLst/>
-            </a:prstGeom>
-            <a:ln w="28575">
-              <a:tailEnd type="triangle"/>
-            </a:ln>
-          </p:spPr>
-          <p:style>
-            <a:lnRef idx="2">
-              <a:schemeClr val="dk1"/>
-            </a:lnRef>
-            <a:fillRef idx="0">
-              <a:schemeClr val="dk1"/>
-            </a:fillRef>
-            <a:effectRef idx="1">
-              <a:schemeClr val="dk1"/>
-            </a:effectRef>
-            <a:fontRef idx="minor">
-              <a:schemeClr val="tx1"/>
-            </a:fontRef>
-          </p:style>
-        </p:cxnSp>
-      </p:grpSp>
-      <p:grpSp>
-        <p:nvGrpSpPr>
-          <p:cNvPr id="20" name="Group 19">
+          <a:prstGeom prst="triangle">
+            <a:avLst/>
+          </a:prstGeom>
+          <a:solidFill>
+            <a:schemeClr val="tx1"/>
+          </a:solidFill>
+          <a:ln>
+            <a:noFill/>
+          </a:ln>
+        </p:spPr>
+        <p:style>
+          <a:lnRef idx="2">
+            <a:schemeClr val="accent1">
+              <a:shade val="15000"/>
+            </a:schemeClr>
+          </a:lnRef>
+          <a:fillRef idx="1">
+            <a:schemeClr val="accent1"/>
+          </a:fillRef>
+          <a:effectRef idx="0">
+            <a:schemeClr val="accent1"/>
+          </a:effectRef>
+          <a:fontRef idx="minor">
+            <a:schemeClr val="lt1"/>
+          </a:fontRef>
+        </p:style>
+        <p:txBody>
+          <a:bodyPr rtlCol="0" anchor="ctr"/>
+          <a:lstStyle/>
+          <a:p>
+            <a:pPr algn="ctr"/>
+            <a:endParaRPr lang="en-US"/>
+          </a:p>
+        </p:txBody>
+      </p:sp>
+      <p:sp>
+        <p:nvSpPr>
+          <p:cNvPr id="7" name="Oval 6">
             <a:extLst>
               <a:ext uri="{FF2B5EF4-FFF2-40B4-BE49-F238E27FC236}">
-                <a16:creationId xmlns:a16="http://schemas.microsoft.com/office/drawing/2014/main" id="{A9D0BC5B-F895-CC6B-A02D-8D866B923CD6}"/>
+                <a16:creationId xmlns:a16="http://schemas.microsoft.com/office/drawing/2014/main" id="{35BE4954-6486-5C0F-892B-111E7F54FBBC}"/>
               </a:ext>
             </a:extLst>
           </p:cNvPr>
-          <p:cNvGrpSpPr/>
-          <p:nvPr/>
-        </p:nvGrpSpPr>
-        <p:grpSpPr>
-          <a:xfrm>
-            <a:off x="3472001" y="161526"/>
-            <a:ext cx="1689543" cy="387626"/>
-            <a:chOff x="2714324" y="1905801"/>
-            <a:chExt cx="1689543" cy="387626"/>
-          </a:xfrm>
-        </p:grpSpPr>
-        <p:grpSp>
-          <p:nvGrpSpPr>
-            <p:cNvPr id="21" name="Group 20">
-              <a:extLst>
-                <a:ext uri="{FF2B5EF4-FFF2-40B4-BE49-F238E27FC236}">
-                  <a16:creationId xmlns:a16="http://schemas.microsoft.com/office/drawing/2014/main" id="{9C5D43F7-54C7-38A9-EC1E-BEF31E1537BA}"/>
-                </a:ext>
-              </a:extLst>
-            </p:cNvPr>
-            <p:cNvGrpSpPr/>
-            <p:nvPr/>
-          </p:nvGrpSpPr>
-          <p:grpSpPr>
-            <a:xfrm>
-              <a:off x="2714324" y="1905801"/>
-              <a:ext cx="1689543" cy="274531"/>
-              <a:chOff x="2406316" y="1795317"/>
-              <a:chExt cx="1689543" cy="385014"/>
-            </a:xfrm>
-          </p:grpSpPr>
-          <p:sp>
-            <p:nvSpPr>
-              <p:cNvPr id="23" name="Rectangle 22">
-                <a:extLst>
-                  <a:ext uri="{FF2B5EF4-FFF2-40B4-BE49-F238E27FC236}">
-                    <a16:creationId xmlns:a16="http://schemas.microsoft.com/office/drawing/2014/main" id="{06676418-94B1-0AAA-D659-A9946CB00D9E}"/>
-                  </a:ext>
-                </a:extLst>
-              </p:cNvPr>
-              <p:cNvSpPr/>
-              <p:nvPr/>
-            </p:nvSpPr>
-            <p:spPr>
-              <a:xfrm>
-                <a:off x="2406316" y="1795320"/>
-                <a:ext cx="187727" cy="385011"/>
-              </a:xfrm>
-              <a:prstGeom prst="rect">
-                <a:avLst/>
-              </a:prstGeom>
-              <a:solidFill>
-                <a:srgbClr val="E8E9FD"/>
-              </a:solidFill>
-              <a:ln w="12700">
-                <a:solidFill>
-                  <a:schemeClr val="tx1">
-                    <a:lumMod val="75000"/>
-                    <a:lumOff val="25000"/>
-                  </a:schemeClr>
-                </a:solidFill>
-              </a:ln>
-            </p:spPr>
-            <p:style>
-              <a:lnRef idx="2">
-                <a:schemeClr val="accent1">
-                  <a:shade val="15000"/>
-                </a:schemeClr>
-              </a:lnRef>
-              <a:fillRef idx="1">
-                <a:schemeClr val="accent1"/>
-              </a:fillRef>
-              <a:effectRef idx="0">
-                <a:schemeClr val="accent1"/>
-              </a:effectRef>
-              <a:fontRef idx="minor">
-                <a:schemeClr val="lt1"/>
-              </a:fontRef>
-            </p:style>
-            <p:txBody>
-              <a:bodyPr rtlCol="0" anchor="ctr"/>
-              <a:lstStyle/>
-              <a:p>
-                <a:pPr algn="ctr"/>
-                <a:endParaRPr lang="en-US"/>
-              </a:p>
-            </p:txBody>
-          </p:sp>
-          <p:sp>
-            <p:nvSpPr>
-              <p:cNvPr id="24" name="Rectangle 23">
-                <a:extLst>
-                  <a:ext uri="{FF2B5EF4-FFF2-40B4-BE49-F238E27FC236}">
-                    <a16:creationId xmlns:a16="http://schemas.microsoft.com/office/drawing/2014/main" id="{2A392737-8CE7-1826-8307-C29DB3512C38}"/>
-                  </a:ext>
-                </a:extLst>
-              </p:cNvPr>
-              <p:cNvSpPr/>
-              <p:nvPr/>
-            </p:nvSpPr>
-            <p:spPr>
-              <a:xfrm>
-                <a:off x="2594043" y="1795319"/>
-                <a:ext cx="187727" cy="385011"/>
-              </a:xfrm>
-              <a:prstGeom prst="rect">
-                <a:avLst/>
-              </a:prstGeom>
-              <a:solidFill>
-                <a:srgbClr val="E8E9FD"/>
-              </a:solidFill>
-              <a:ln w="12700">
-                <a:solidFill>
-                  <a:schemeClr val="tx1">
-                    <a:lumMod val="75000"/>
-                    <a:lumOff val="25000"/>
-                  </a:schemeClr>
-                </a:solidFill>
-              </a:ln>
-            </p:spPr>
-            <p:style>
-              <a:lnRef idx="2">
-                <a:schemeClr val="accent1">
-                  <a:shade val="15000"/>
-                </a:schemeClr>
-              </a:lnRef>
-              <a:fillRef idx="1">
-                <a:schemeClr val="accent1"/>
-              </a:fillRef>
-              <a:effectRef idx="0">
-                <a:schemeClr val="accent1"/>
-              </a:effectRef>
-              <a:fontRef idx="minor">
-                <a:schemeClr val="lt1"/>
-              </a:fontRef>
-            </p:style>
-            <p:txBody>
-              <a:bodyPr rtlCol="0" anchor="ctr"/>
-              <a:lstStyle/>
-              <a:p>
-                <a:pPr algn="ctr"/>
-                <a:endParaRPr lang="en-US"/>
-              </a:p>
-            </p:txBody>
-          </p:sp>
-          <p:sp>
-            <p:nvSpPr>
-              <p:cNvPr id="25" name="Rectangle 24">
-                <a:extLst>
-                  <a:ext uri="{FF2B5EF4-FFF2-40B4-BE49-F238E27FC236}">
-                    <a16:creationId xmlns:a16="http://schemas.microsoft.com/office/drawing/2014/main" id="{B6411AEB-09F5-D96D-5FD8-210D659E2F22}"/>
-                  </a:ext>
-                </a:extLst>
-              </p:cNvPr>
-              <p:cNvSpPr/>
-              <p:nvPr/>
-            </p:nvSpPr>
-            <p:spPr>
-              <a:xfrm>
-                <a:off x="2781770" y="1795319"/>
-                <a:ext cx="187727" cy="385011"/>
-              </a:xfrm>
-              <a:prstGeom prst="rect">
-                <a:avLst/>
-              </a:prstGeom>
-              <a:solidFill>
-                <a:srgbClr val="E8E9FD"/>
-              </a:solidFill>
-              <a:ln w="12700">
-                <a:solidFill>
-                  <a:schemeClr val="tx1">
-                    <a:lumMod val="75000"/>
-                    <a:lumOff val="25000"/>
-                  </a:schemeClr>
-                </a:solidFill>
-              </a:ln>
-            </p:spPr>
-            <p:style>
-              <a:lnRef idx="2">
-                <a:schemeClr val="accent1">
-                  <a:shade val="15000"/>
-                </a:schemeClr>
-              </a:lnRef>
-              <a:fillRef idx="1">
-                <a:schemeClr val="accent1"/>
-              </a:fillRef>
-              <a:effectRef idx="0">
-                <a:schemeClr val="accent1"/>
-              </a:effectRef>
-              <a:fontRef idx="minor">
-                <a:schemeClr val="lt1"/>
-              </a:fontRef>
-            </p:style>
-            <p:txBody>
-              <a:bodyPr rtlCol="0" anchor="ctr"/>
-              <a:lstStyle/>
-              <a:p>
-                <a:pPr algn="ctr"/>
-                <a:endParaRPr lang="en-US"/>
-              </a:p>
-            </p:txBody>
-          </p:sp>
-          <p:sp>
-            <p:nvSpPr>
-              <p:cNvPr id="26" name="Rectangle 25">
-                <a:extLst>
-                  <a:ext uri="{FF2B5EF4-FFF2-40B4-BE49-F238E27FC236}">
-                    <a16:creationId xmlns:a16="http://schemas.microsoft.com/office/drawing/2014/main" id="{B2C38944-C2BF-912E-5032-8012B13996A8}"/>
-                  </a:ext>
-                </a:extLst>
-              </p:cNvPr>
-              <p:cNvSpPr/>
-              <p:nvPr/>
-            </p:nvSpPr>
-            <p:spPr>
-              <a:xfrm>
-                <a:off x="2969497" y="1795319"/>
-                <a:ext cx="187727" cy="385011"/>
-              </a:xfrm>
-              <a:prstGeom prst="rect">
-                <a:avLst/>
-              </a:prstGeom>
-              <a:solidFill>
-                <a:srgbClr val="E8E9FD"/>
-              </a:solidFill>
-              <a:ln w="12700">
-                <a:solidFill>
-                  <a:schemeClr val="tx1">
-                    <a:lumMod val="75000"/>
-                    <a:lumOff val="25000"/>
-                  </a:schemeClr>
-                </a:solidFill>
-              </a:ln>
-            </p:spPr>
-            <p:style>
-              <a:lnRef idx="2">
-                <a:schemeClr val="accent1">
-                  <a:shade val="15000"/>
-                </a:schemeClr>
-              </a:lnRef>
-              <a:fillRef idx="1">
-                <a:schemeClr val="accent1"/>
-              </a:fillRef>
-              <a:effectRef idx="0">
-                <a:schemeClr val="accent1"/>
-              </a:effectRef>
-              <a:fontRef idx="minor">
-                <a:schemeClr val="lt1"/>
-              </a:fontRef>
-            </p:style>
-            <p:txBody>
-              <a:bodyPr rtlCol="0" anchor="ctr"/>
-              <a:lstStyle/>
-              <a:p>
-                <a:pPr algn="ctr"/>
-                <a:endParaRPr lang="en-US"/>
-              </a:p>
-            </p:txBody>
-          </p:sp>
-          <p:sp>
-            <p:nvSpPr>
-              <p:cNvPr id="27" name="Rectangle 26">
-                <a:extLst>
-                  <a:ext uri="{FF2B5EF4-FFF2-40B4-BE49-F238E27FC236}">
-                    <a16:creationId xmlns:a16="http://schemas.microsoft.com/office/drawing/2014/main" id="{A022D64D-9A9D-6CE3-6E7D-3A73C6E88A1B}"/>
-                  </a:ext>
-                </a:extLst>
-              </p:cNvPr>
-              <p:cNvSpPr/>
-              <p:nvPr/>
-            </p:nvSpPr>
-            <p:spPr>
-              <a:xfrm>
-                <a:off x="3157224" y="1795318"/>
-                <a:ext cx="187727" cy="385011"/>
-              </a:xfrm>
-              <a:prstGeom prst="rect">
-                <a:avLst/>
-              </a:prstGeom>
-              <a:solidFill>
-                <a:srgbClr val="E8E9FD"/>
-              </a:solidFill>
-              <a:ln w="12700">
-                <a:solidFill>
-                  <a:schemeClr val="tx1">
-                    <a:lumMod val="75000"/>
-                    <a:lumOff val="25000"/>
-                  </a:schemeClr>
-                </a:solidFill>
-              </a:ln>
-            </p:spPr>
-            <p:style>
-              <a:lnRef idx="2">
-                <a:schemeClr val="accent1">
-                  <a:shade val="15000"/>
-                </a:schemeClr>
-              </a:lnRef>
-              <a:fillRef idx="1">
-                <a:schemeClr val="accent1"/>
-              </a:fillRef>
-              <a:effectRef idx="0">
-                <a:schemeClr val="accent1"/>
-              </a:effectRef>
-              <a:fontRef idx="minor">
-                <a:schemeClr val="lt1"/>
-              </a:fontRef>
-            </p:style>
-            <p:txBody>
-              <a:bodyPr rtlCol="0" anchor="ctr"/>
-              <a:lstStyle/>
-              <a:p>
-                <a:pPr algn="ctr"/>
-                <a:endParaRPr lang="en-US"/>
-              </a:p>
-            </p:txBody>
-          </p:sp>
-          <p:sp>
-            <p:nvSpPr>
-              <p:cNvPr id="28" name="Rectangle 27">
-                <a:extLst>
-                  <a:ext uri="{FF2B5EF4-FFF2-40B4-BE49-F238E27FC236}">
-                    <a16:creationId xmlns:a16="http://schemas.microsoft.com/office/drawing/2014/main" id="{21960055-86E8-7ECA-E2DE-E760909E7437}"/>
-                  </a:ext>
-                </a:extLst>
-              </p:cNvPr>
-              <p:cNvSpPr/>
-              <p:nvPr/>
-            </p:nvSpPr>
-            <p:spPr>
-              <a:xfrm>
-                <a:off x="3344951" y="1795318"/>
-                <a:ext cx="187727" cy="385011"/>
-              </a:xfrm>
-              <a:prstGeom prst="rect">
-                <a:avLst/>
-              </a:prstGeom>
-              <a:solidFill>
-                <a:srgbClr val="E8E9FD"/>
-              </a:solidFill>
-              <a:ln w="12700">
-                <a:solidFill>
-                  <a:schemeClr val="tx1">
-                    <a:lumMod val="75000"/>
-                    <a:lumOff val="25000"/>
-                  </a:schemeClr>
-                </a:solidFill>
-              </a:ln>
-            </p:spPr>
-            <p:style>
-              <a:lnRef idx="2">
-                <a:schemeClr val="accent1">
-                  <a:shade val="15000"/>
-                </a:schemeClr>
-              </a:lnRef>
-              <a:fillRef idx="1">
-                <a:schemeClr val="accent1"/>
-              </a:fillRef>
-              <a:effectRef idx="0">
-                <a:schemeClr val="accent1"/>
-              </a:effectRef>
-              <a:fontRef idx="minor">
-                <a:schemeClr val="lt1"/>
-              </a:fontRef>
-            </p:style>
-            <p:txBody>
-              <a:bodyPr rtlCol="0" anchor="ctr"/>
-              <a:lstStyle/>
-              <a:p>
-                <a:pPr algn="ctr"/>
-                <a:endParaRPr lang="en-US"/>
-              </a:p>
-            </p:txBody>
-          </p:sp>
-          <p:sp>
-            <p:nvSpPr>
-              <p:cNvPr id="29" name="Rectangle 28">
-                <a:extLst>
-                  <a:ext uri="{FF2B5EF4-FFF2-40B4-BE49-F238E27FC236}">
-                    <a16:creationId xmlns:a16="http://schemas.microsoft.com/office/drawing/2014/main" id="{8A94367C-4B75-C1AE-675D-A7B1485B17C4}"/>
-                  </a:ext>
-                </a:extLst>
-              </p:cNvPr>
-              <p:cNvSpPr/>
-              <p:nvPr/>
-            </p:nvSpPr>
-            <p:spPr>
-              <a:xfrm>
-                <a:off x="3532678" y="1795318"/>
-                <a:ext cx="187727" cy="385011"/>
-              </a:xfrm>
-              <a:prstGeom prst="rect">
-                <a:avLst/>
-              </a:prstGeom>
-              <a:solidFill>
-                <a:srgbClr val="E8E9FD"/>
-              </a:solidFill>
-              <a:ln w="12700">
-                <a:solidFill>
-                  <a:schemeClr val="tx1">
-                    <a:lumMod val="75000"/>
-                    <a:lumOff val="25000"/>
-                  </a:schemeClr>
-                </a:solidFill>
-              </a:ln>
-            </p:spPr>
-            <p:style>
-              <a:lnRef idx="2">
-                <a:schemeClr val="accent1">
-                  <a:shade val="15000"/>
-                </a:schemeClr>
-              </a:lnRef>
-              <a:fillRef idx="1">
-                <a:schemeClr val="accent1"/>
-              </a:fillRef>
-              <a:effectRef idx="0">
-                <a:schemeClr val="accent1"/>
-              </a:effectRef>
-              <a:fontRef idx="minor">
-                <a:schemeClr val="lt1"/>
-              </a:fontRef>
-            </p:style>
-            <p:txBody>
-              <a:bodyPr rtlCol="0" anchor="ctr"/>
-              <a:lstStyle/>
-              <a:p>
-                <a:pPr algn="ctr"/>
-                <a:endParaRPr lang="en-US"/>
-              </a:p>
-            </p:txBody>
-          </p:sp>
-          <p:sp>
-            <p:nvSpPr>
-              <p:cNvPr id="30" name="Rectangle 29">
-                <a:extLst>
-                  <a:ext uri="{FF2B5EF4-FFF2-40B4-BE49-F238E27FC236}">
-                    <a16:creationId xmlns:a16="http://schemas.microsoft.com/office/drawing/2014/main" id="{1F5EA5B6-04DF-3455-8A06-654365779FF8}"/>
-                  </a:ext>
-                </a:extLst>
-              </p:cNvPr>
-              <p:cNvSpPr/>
-              <p:nvPr/>
-            </p:nvSpPr>
-            <p:spPr>
-              <a:xfrm>
-                <a:off x="3720405" y="1795317"/>
-                <a:ext cx="187727" cy="385011"/>
-              </a:xfrm>
-              <a:prstGeom prst="rect">
-                <a:avLst/>
-              </a:prstGeom>
-              <a:solidFill>
-                <a:srgbClr val="D8AACE"/>
-              </a:solidFill>
-              <a:ln w="12700">
-                <a:solidFill>
-                  <a:schemeClr val="tx1">
-                    <a:lumMod val="75000"/>
-                    <a:lumOff val="25000"/>
-                  </a:schemeClr>
-                </a:solidFill>
-              </a:ln>
-            </p:spPr>
-            <p:style>
-              <a:lnRef idx="2">
-                <a:schemeClr val="accent1">
-                  <a:shade val="15000"/>
-                </a:schemeClr>
-              </a:lnRef>
-              <a:fillRef idx="1">
-                <a:schemeClr val="accent1"/>
-              </a:fillRef>
-              <a:effectRef idx="0">
-                <a:schemeClr val="accent1"/>
-              </a:effectRef>
-              <a:fontRef idx="minor">
-                <a:schemeClr val="lt1"/>
-              </a:fontRef>
-            </p:style>
-            <p:txBody>
-              <a:bodyPr rtlCol="0" anchor="ctr"/>
-              <a:lstStyle/>
-              <a:p>
-                <a:pPr algn="ctr"/>
-                <a:endParaRPr lang="en-US"/>
-              </a:p>
-            </p:txBody>
-          </p:sp>
-          <p:sp>
-            <p:nvSpPr>
-              <p:cNvPr id="31" name="Rectangle 30">
-                <a:extLst>
-                  <a:ext uri="{FF2B5EF4-FFF2-40B4-BE49-F238E27FC236}">
-                    <a16:creationId xmlns:a16="http://schemas.microsoft.com/office/drawing/2014/main" id="{C9695238-EBCB-27C2-2845-A740081F0B62}"/>
-                  </a:ext>
-                </a:extLst>
-              </p:cNvPr>
-              <p:cNvSpPr/>
-              <p:nvPr/>
-            </p:nvSpPr>
-            <p:spPr>
-              <a:xfrm>
-                <a:off x="3908132" y="1795317"/>
-                <a:ext cx="187727" cy="385011"/>
-              </a:xfrm>
-              <a:prstGeom prst="rect">
-                <a:avLst/>
-              </a:prstGeom>
-              <a:solidFill>
-                <a:srgbClr val="C4BBEC"/>
-              </a:solidFill>
-              <a:ln w="12700">
-                <a:solidFill>
-                  <a:schemeClr val="tx1">
-                    <a:lumMod val="75000"/>
-                    <a:lumOff val="25000"/>
-                  </a:schemeClr>
-                </a:solidFill>
-              </a:ln>
-            </p:spPr>
-            <p:style>
-              <a:lnRef idx="2">
-                <a:schemeClr val="accent1">
-                  <a:shade val="15000"/>
-                </a:schemeClr>
-              </a:lnRef>
-              <a:fillRef idx="1">
-                <a:schemeClr val="accent1"/>
-              </a:fillRef>
-              <a:effectRef idx="0">
-                <a:schemeClr val="accent1"/>
-              </a:effectRef>
-              <a:fontRef idx="minor">
-                <a:schemeClr val="lt1"/>
-              </a:fontRef>
-            </p:style>
-            <p:txBody>
-              <a:bodyPr rtlCol="0" anchor="ctr"/>
-              <a:lstStyle/>
-              <a:p>
-                <a:pPr algn="ctr"/>
-                <a:endParaRPr lang="en-US"/>
-              </a:p>
-            </p:txBody>
-          </p:sp>
-        </p:grpSp>
-        <p:cxnSp>
-          <p:nvCxnSpPr>
-            <p:cNvPr id="22" name="Straight Arrow Connector 21">
-              <a:extLst>
-                <a:ext uri="{FF2B5EF4-FFF2-40B4-BE49-F238E27FC236}">
-                  <a16:creationId xmlns:a16="http://schemas.microsoft.com/office/drawing/2014/main" id="{932E50FE-050E-B76B-25FE-3A344FF8D3CE}"/>
-                </a:ext>
-              </a:extLst>
-            </p:cNvPr>
-            <p:cNvCxnSpPr/>
-            <p:nvPr/>
-          </p:nvCxnSpPr>
-          <p:spPr>
-            <a:xfrm flipV="1">
-              <a:off x="3927629" y="2067233"/>
-              <a:ext cx="0" cy="226194"/>
-            </a:xfrm>
-            <a:prstGeom prst="straightConnector1">
-              <a:avLst/>
-            </a:prstGeom>
-            <a:ln w="28575">
-              <a:tailEnd type="triangle"/>
-            </a:ln>
-          </p:spPr>
-          <p:style>
-            <a:lnRef idx="2">
-              <a:schemeClr val="dk1"/>
-            </a:lnRef>
-            <a:fillRef idx="0">
-              <a:schemeClr val="dk1"/>
-            </a:fillRef>
-            <a:effectRef idx="1">
-              <a:schemeClr val="dk1"/>
-            </a:effectRef>
-            <a:fontRef idx="minor">
-              <a:schemeClr val="tx1"/>
-            </a:fontRef>
-          </p:style>
-        </p:cxnSp>
-      </p:grpSp>
-      <p:sp>
-        <p:nvSpPr>
-          <p:cNvPr id="32" name="TextBox 31">
-            <a:extLst>
-              <a:ext uri="{FF2B5EF4-FFF2-40B4-BE49-F238E27FC236}">
-                <a16:creationId xmlns:a16="http://schemas.microsoft.com/office/drawing/2014/main" id="{84D91195-E7D9-61D4-C5D0-435A455F4BD3}"/>
-              </a:ext>
-            </a:extLst>
-          </p:cNvPr>
-          <p:cNvSpPr txBox="1"/>
+          <p:cNvSpPr/>
           <p:nvPr/>
         </p:nvSpPr>
         <p:spPr>
           <a:xfrm>
-            <a:off x="2803" y="21791"/>
-            <a:ext cx="304892" cy="307777"/>
+            <a:off x="1023350" y="165304"/>
+            <a:ext cx="71918" cy="71918"/>
           </a:xfrm>
-          <a:prstGeom prst="rect">
+          <a:prstGeom prst="ellipse">
             <a:avLst/>
           </a:prstGeom>
-          <a:noFill/>
+          <a:solidFill>
+            <a:schemeClr val="tx1"/>
+          </a:solidFill>
+          <a:ln>
+            <a:noFill/>
+          </a:ln>
         </p:spPr>
-        <p:txBody>
-          <a:bodyPr wrap="none" rtlCol="0">
-            <a:spAutoFit/>
-          </a:bodyPr>
+        <p:style>
+          <a:lnRef idx="2">
+            <a:schemeClr val="accent1">
+              <a:shade val="15000"/>
+            </a:schemeClr>
+          </a:lnRef>
+          <a:fillRef idx="1">
+            <a:schemeClr val="accent1"/>
+          </a:fillRef>
+          <a:effectRef idx="0">
+            <a:schemeClr val="accent1"/>
+          </a:effectRef>
+          <a:fontRef idx="minor">
+            <a:schemeClr val="lt1"/>
+          </a:fontRef>
+        </p:style>
+        <p:txBody>
+          <a:bodyPr rtlCol="0" anchor="ctr"/>
           <a:lstStyle/>
           <a:p>
             <a:pPr algn="ctr"/>
-            <a:r>
-              <a:rPr lang="en-US" sz="1400" dirty="0">
-                <a:latin typeface="Helvetica" pitchFamily="2" charset="0"/>
-              </a:rPr>
-              <a:t>A</a:t>
-            </a:r>
-          </a:p>
-        </p:txBody>
-      </p:sp>
-      <p:sp>
-        <p:nvSpPr>
-          <p:cNvPr id="33" name="TextBox 32">
-            <a:extLst>
-              <a:ext uri="{FF2B5EF4-FFF2-40B4-BE49-F238E27FC236}">
-                <a16:creationId xmlns:a16="http://schemas.microsoft.com/office/drawing/2014/main" id="{9208DCFA-E1D9-D42A-FB45-BE9DA516F5B2}"/>
-              </a:ext>
-            </a:extLst>
-          </p:cNvPr>
-          <p:cNvSpPr txBox="1"/>
-          <p:nvPr/>
-        </p:nvSpPr>
-        <p:spPr>
-          <a:xfrm>
-            <a:off x="3047770" y="21790"/>
-            <a:ext cx="304892" cy="307777"/>
-          </a:xfrm>
-          <a:prstGeom prst="rect">
-            <a:avLst/>
-          </a:prstGeom>
-          <a:noFill/>
-        </p:spPr>
-        <p:txBody>
-          <a:bodyPr wrap="none" rtlCol="0">
-            <a:spAutoFit/>
-          </a:bodyPr>
-          <a:lstStyle/>
-          <a:p>
-            <a:pPr algn="ctr"/>
-            <a:r>
-              <a:rPr lang="en-US" sz="1400" dirty="0">
-                <a:latin typeface="Helvetica" pitchFamily="2" charset="0"/>
-              </a:rPr>
-              <a:t>B</a:t>
-            </a:r>
+            <a:endParaRPr lang="en-US"/>
           </a:p>
         </p:txBody>
       </p:sp>
     </p:spTree>
     <p:extLst>
       <p:ext uri="{BB962C8B-B14F-4D97-AF65-F5344CB8AC3E}">
-        <p14:creationId xmlns:p14="http://schemas.microsoft.com/office/powerpoint/2010/main" val="288288077"/>
+        <p14:creationId xmlns:p14="http://schemas.microsoft.com/office/powerpoint/2010/main" val="2242790696"/>
       </p:ext>
     </p:extLst>
   </p:cSld>
@@ -4278,12 +3122,12 @@
 <file path=ppt/theme/theme1.xml><?xml version="1.0" encoding="utf-8"?>
 <a:theme xmlns:a="http://schemas.openxmlformats.org/drawingml/2006/main" name="Office Theme">
   <a:themeElements>
-    <a:clrScheme name="Office Theme">
+    <a:clrScheme name="petri2">
       <a:dk1>
-        <a:sysClr val="windowText" lastClr="000000"/>
+        <a:srgbClr val="000000"/>
       </a:dk1>
       <a:lt1>
-        <a:sysClr val="window" lastClr="FFFFFF"/>
+        <a:srgbClr val="FFFFFF"/>
       </a:lt1>
       <a:dk2>
         <a:srgbClr val="0E2841"/>
@@ -4292,19 +3136,19 @@
         <a:srgbClr val="E8E8E8"/>
       </a:lt2>
       <a:accent1>
-        <a:srgbClr val="156082"/>
+        <a:srgbClr val="8A3F79"/>
       </a:accent1>
       <a:accent2>
-        <a:srgbClr val="E97132"/>
+        <a:srgbClr val="8294F5"/>
       </a:accent2>
       <a:accent3>
-        <a:srgbClr val="196B24"/>
+        <a:srgbClr val="E6E9FC"/>
       </a:accent3>
       <a:accent4>
-        <a:srgbClr val="0F9ED5"/>
+        <a:srgbClr val="C3BAEB"/>
       </a:accent4>
       <a:accent5>
-        <a:srgbClr val="A02B93"/>
+        <a:srgbClr val="D8AACE"/>
       </a:accent5>
       <a:accent6>
         <a:srgbClr val="4EA72E"/>
